--- a/docs/plots/carbo/jx_carbo_adjcif_throm2.pptx
+++ b/docs/plots/carbo/jx_carbo_adjcif_throm2.pptx
@@ -2271,7 +2271,7 @@
           </p:nvSpPr>
           <p:spPr>
             <a:xfrm>
-              <a:off x="972874" y="5280685"/>
+              <a:off x="972874" y="5253655"/>
               <a:ext cx="7644336" cy="0"/>
             </a:xfrm>
             <a:custGeom>
@@ -2314,7 +2314,7 @@
           </p:nvSpPr>
           <p:spPr>
             <a:xfrm>
-              <a:off x="972874" y="4681212"/>
+              <a:off x="972874" y="4600121"/>
               <a:ext cx="7644336" cy="0"/>
             </a:xfrm>
             <a:custGeom>
@@ -2357,7 +2357,7 @@
           </p:nvSpPr>
           <p:spPr>
             <a:xfrm>
-              <a:off x="972874" y="4081739"/>
+              <a:off x="972874" y="3946587"/>
               <a:ext cx="7644336" cy="0"/>
             </a:xfrm>
             <a:custGeom>
@@ -2400,7 +2400,7 @@
           </p:nvSpPr>
           <p:spPr>
             <a:xfrm>
-              <a:off x="972874" y="3482266"/>
+              <a:off x="972874" y="3293053"/>
               <a:ext cx="7644336" cy="0"/>
             </a:xfrm>
             <a:custGeom>
@@ -2443,7 +2443,7 @@
           </p:nvSpPr>
           <p:spPr>
             <a:xfrm>
-              <a:off x="972874" y="2882793"/>
+              <a:off x="972874" y="2639519"/>
               <a:ext cx="7644336" cy="0"/>
             </a:xfrm>
             <a:custGeom>
@@ -2701,7 +2701,7 @@
           </p:nvSpPr>
           <p:spPr>
             <a:xfrm>
-              <a:off x="972874" y="4980949"/>
+              <a:off x="972874" y="4926888"/>
               <a:ext cx="7644336" cy="0"/>
             </a:xfrm>
             <a:custGeom>
@@ -2744,7 +2744,7 @@
           </p:nvSpPr>
           <p:spPr>
             <a:xfrm>
-              <a:off x="972874" y="4381476"/>
+              <a:off x="972874" y="4273354"/>
               <a:ext cx="7644336" cy="0"/>
             </a:xfrm>
             <a:custGeom>
@@ -2787,7 +2787,7 @@
           </p:nvSpPr>
           <p:spPr>
             <a:xfrm>
-              <a:off x="972874" y="3782003"/>
+              <a:off x="972874" y="3619820"/>
               <a:ext cx="7644336" cy="0"/>
             </a:xfrm>
             <a:custGeom>
@@ -2830,7 +2830,7 @@
           </p:nvSpPr>
           <p:spPr>
             <a:xfrm>
-              <a:off x="972874" y="3182530"/>
+              <a:off x="972874" y="2966286"/>
               <a:ext cx="7644336" cy="0"/>
             </a:xfrm>
             <a:custGeom>
@@ -3002,72 +3002,72 @@
           </p:nvSpPr>
           <p:spPr>
             <a:xfrm>
-              <a:off x="1320344" y="4752606"/>
-              <a:ext cx="6949396" cy="778960"/>
+              <a:off x="1320344" y="4615919"/>
+              <a:ext cx="6949396" cy="907618"/>
             </a:xfrm>
             <a:custGeom>
               <a:avLst/>
               <a:pathLst>
-                <a:path w="6949396" h="778960">
+                <a:path w="6949396" h="907618">
                   <a:moveTo>
-                    <a:pt x="0" y="778960"/>
+                    <a:pt x="0" y="907618"/>
                   </a:moveTo>
                   <a:lnTo>
-                    <a:pt x="106913" y="778960"/>
-                  </a:lnTo>
-                  <a:lnTo>
-                    <a:pt x="106913" y="681521"/>
-                  </a:lnTo>
-                  <a:lnTo>
-                    <a:pt x="427655" y="681521"/>
-                  </a:lnTo>
-                  <a:lnTo>
-                    <a:pt x="427655" y="584116"/>
-                  </a:lnTo>
-                  <a:lnTo>
-                    <a:pt x="534568" y="584116"/>
-                  </a:lnTo>
-                  <a:lnTo>
-                    <a:pt x="534568" y="483083"/>
-                  </a:lnTo>
-                  <a:lnTo>
-                    <a:pt x="641482" y="483083"/>
-                  </a:lnTo>
-                  <a:lnTo>
-                    <a:pt x="641482" y="430834"/>
-                  </a:lnTo>
-                  <a:lnTo>
-                    <a:pt x="748396" y="430834"/>
-                  </a:lnTo>
-                  <a:lnTo>
-                    <a:pt x="748396" y="378088"/>
-                  </a:lnTo>
-                  <a:lnTo>
-                    <a:pt x="2459017" y="378088"/>
-                  </a:lnTo>
-                  <a:lnTo>
-                    <a:pt x="2459017" y="220873"/>
-                  </a:lnTo>
-                  <a:lnTo>
-                    <a:pt x="2886672" y="220873"/>
-                  </a:lnTo>
-                  <a:lnTo>
-                    <a:pt x="2886672" y="166942"/>
-                  </a:lnTo>
-                  <a:lnTo>
-                    <a:pt x="3741982" y="166942"/>
-                  </a:lnTo>
-                  <a:lnTo>
-                    <a:pt x="3741982" y="111789"/>
-                  </a:lnTo>
-                  <a:lnTo>
-                    <a:pt x="3848896" y="111789"/>
-                  </a:lnTo>
-                  <a:lnTo>
-                    <a:pt x="3848896" y="56327"/>
-                  </a:lnTo>
-                  <a:lnTo>
-                    <a:pt x="6949396" y="56327"/>
+                    <a:pt x="106913" y="907618"/>
+                  </a:lnTo>
+                  <a:lnTo>
+                    <a:pt x="106913" y="794183"/>
+                  </a:lnTo>
+                  <a:lnTo>
+                    <a:pt x="427655" y="794183"/>
+                  </a:lnTo>
+                  <a:lnTo>
+                    <a:pt x="427655" y="680961"/>
+                  </a:lnTo>
+                  <a:lnTo>
+                    <a:pt x="534568" y="680961"/>
+                  </a:lnTo>
+                  <a:lnTo>
+                    <a:pt x="534568" y="563161"/>
+                  </a:lnTo>
+                  <a:lnTo>
+                    <a:pt x="641482" y="563161"/>
+                  </a:lnTo>
+                  <a:lnTo>
+                    <a:pt x="641482" y="501986"/>
+                  </a:lnTo>
+                  <a:lnTo>
+                    <a:pt x="748396" y="501986"/>
+                  </a:lnTo>
+                  <a:lnTo>
+                    <a:pt x="748396" y="440307"/>
+                  </a:lnTo>
+                  <a:lnTo>
+                    <a:pt x="2459017" y="440307"/>
+                  </a:lnTo>
+                  <a:lnTo>
+                    <a:pt x="2459017" y="256588"/>
+                  </a:lnTo>
+                  <a:lnTo>
+                    <a:pt x="2886672" y="256588"/>
+                  </a:lnTo>
+                  <a:lnTo>
+                    <a:pt x="2886672" y="193804"/>
+                  </a:lnTo>
+                  <a:lnTo>
+                    <a:pt x="3741982" y="193804"/>
+                  </a:lnTo>
+                  <a:lnTo>
+                    <a:pt x="3741982" y="129668"/>
+                  </a:lnTo>
+                  <a:lnTo>
+                    <a:pt x="3848896" y="129668"/>
+                  </a:lnTo>
+                  <a:lnTo>
+                    <a:pt x="3848896" y="65288"/>
+                  </a:lnTo>
+                  <a:lnTo>
+                    <a:pt x="6949396" y="65288"/>
                   </a:lnTo>
                   <a:lnTo>
                     <a:pt x="6949396" y="0"/>
@@ -3100,71 +3100,71 @@
           <p:spPr>
             <a:xfrm>
               <a:off x="1320344" y="2861938"/>
-              <a:ext cx="6949396" cy="2542447"/>
+              <a:ext cx="6949396" cy="2544168"/>
             </a:xfrm>
             <a:custGeom>
               <a:avLst/>
               <a:pathLst>
-                <a:path w="6949396" h="2542447">
+                <a:path w="6949396" h="2544168">
                   <a:moveTo>
-                    <a:pt x="0" y="2542447"/>
+                    <a:pt x="0" y="2544168"/>
                   </a:moveTo>
                   <a:lnTo>
-                    <a:pt x="106913" y="2542447"/>
-                  </a:lnTo>
-                  <a:lnTo>
-                    <a:pt x="106913" y="2197453"/>
-                  </a:lnTo>
-                  <a:lnTo>
-                    <a:pt x="427655" y="2197453"/>
-                  </a:lnTo>
-                  <a:lnTo>
-                    <a:pt x="427655" y="1860575"/>
-                  </a:lnTo>
-                  <a:lnTo>
-                    <a:pt x="534568" y="1860575"/>
-                  </a:lnTo>
-                  <a:lnTo>
-                    <a:pt x="534568" y="1519441"/>
-                  </a:lnTo>
-                  <a:lnTo>
-                    <a:pt x="641482" y="1519441"/>
-                  </a:lnTo>
-                  <a:lnTo>
-                    <a:pt x="641482" y="1346285"/>
-                  </a:lnTo>
-                  <a:lnTo>
-                    <a:pt x="748396" y="1346285"/>
-                  </a:lnTo>
-                  <a:lnTo>
-                    <a:pt x="748396" y="1173702"/>
-                  </a:lnTo>
-                  <a:lnTo>
-                    <a:pt x="2459017" y="1173702"/>
-                  </a:lnTo>
-                  <a:lnTo>
-                    <a:pt x="2459017" y="672331"/>
-                  </a:lnTo>
-                  <a:lnTo>
-                    <a:pt x="2886672" y="672331"/>
-                  </a:lnTo>
-                  <a:lnTo>
-                    <a:pt x="2886672" y="504758"/>
-                  </a:lnTo>
-                  <a:lnTo>
-                    <a:pt x="3741982" y="504758"/>
-                  </a:lnTo>
-                  <a:lnTo>
-                    <a:pt x="3741982" y="335683"/>
-                  </a:lnTo>
-                  <a:lnTo>
-                    <a:pt x="3848896" y="335683"/>
-                  </a:lnTo>
-                  <a:lnTo>
-                    <a:pt x="3848896" y="167975"/>
-                  </a:lnTo>
-                  <a:lnTo>
-                    <a:pt x="6949396" y="167975"/>
+                    <a:pt x="106913" y="2544168"/>
+                  </a:lnTo>
+                  <a:lnTo>
+                    <a:pt x="106913" y="2202021"/>
+                  </a:lnTo>
+                  <a:lnTo>
+                    <a:pt x="427655" y="2202021"/>
+                  </a:lnTo>
+                  <a:lnTo>
+                    <a:pt x="427655" y="1867656"/>
+                  </a:lnTo>
+                  <a:lnTo>
+                    <a:pt x="534568" y="1867656"/>
+                  </a:lnTo>
+                  <a:lnTo>
+                    <a:pt x="534568" y="1527205"/>
+                  </a:lnTo>
+                  <a:lnTo>
+                    <a:pt x="641482" y="1527205"/>
+                  </a:lnTo>
+                  <a:lnTo>
+                    <a:pt x="641482" y="1353346"/>
+                  </a:lnTo>
+                  <a:lnTo>
+                    <a:pt x="748396" y="1353346"/>
+                  </a:lnTo>
+                  <a:lnTo>
+                    <a:pt x="748396" y="1180068"/>
+                  </a:lnTo>
+                  <a:lnTo>
+                    <a:pt x="2459017" y="1180068"/>
+                  </a:lnTo>
+                  <a:lnTo>
+                    <a:pt x="2459017" y="675704"/>
+                  </a:lnTo>
+                  <a:lnTo>
+                    <a:pt x="2886672" y="675704"/>
+                  </a:lnTo>
+                  <a:lnTo>
+                    <a:pt x="2886672" y="507316"/>
+                  </a:lnTo>
+                  <a:lnTo>
+                    <a:pt x="3741982" y="507316"/>
+                  </a:lnTo>
+                  <a:lnTo>
+                    <a:pt x="3741982" y="337358"/>
+                  </a:lnTo>
+                  <a:lnTo>
+                    <a:pt x="3848896" y="337358"/>
+                  </a:lnTo>
+                  <a:lnTo>
+                    <a:pt x="3848896" y="168819"/>
+                  </a:lnTo>
+                  <a:lnTo>
+                    <a:pt x="6949396" y="168819"/>
                   </a:lnTo>
                   <a:lnTo>
                     <a:pt x="6949396" y="0"/>
@@ -3242,7 +3242,7 @@
           </p:nvSpPr>
           <p:spPr>
             <a:xfrm>
-              <a:off x="692708" y="4940898"/>
+              <a:off x="692708" y="4886837"/>
               <a:ext cx="217535" cy="80101"/>
             </a:xfrm>
             <a:prstGeom prst="rect">
@@ -3288,7 +3288,7 @@
           </p:nvSpPr>
           <p:spPr>
             <a:xfrm>
-              <a:off x="692708" y="4341425"/>
+              <a:off x="692708" y="4233303"/>
               <a:ext cx="217535" cy="80101"/>
             </a:xfrm>
             <a:prstGeom prst="rect">
@@ -3334,7 +3334,7 @@
           </p:nvSpPr>
           <p:spPr>
             <a:xfrm>
-              <a:off x="692708" y="3741952"/>
+              <a:off x="692708" y="3579769"/>
               <a:ext cx="217535" cy="80101"/>
             </a:xfrm>
             <a:prstGeom prst="rect">
@@ -3380,7 +3380,7 @@
           </p:nvSpPr>
           <p:spPr>
             <a:xfrm>
-              <a:off x="692708" y="3142479"/>
+              <a:off x="692708" y="2926235"/>
               <a:ext cx="217535" cy="80101"/>
             </a:xfrm>
             <a:prstGeom prst="rect">
@@ -3861,7 +3861,7 @@
                   <a:latin typeface="Helvetica"/>
                   <a:cs typeface="Helvetica"/>
                 </a:rPr>
-                <a:t>Discrep &gt;= +25 vs &lt;+25: subHR = 3.62 (95% CI 1.12-11.74), p = 0.032</a:t>
+                <a:t>Discrep &gt;= +25 vs &lt;+25: subHR = 3.08 (95% CI 0.88-10.74), p = 0.077</a:t>
               </a:r>
             </a:p>
           </p:txBody>

--- a/docs/plots/carbo/jx_carbo_adjcif_throm2.pptx
+++ b/docs/plots/carbo/jx_carbo_adjcif_throm2.pptx
@@ -2271,7 +2271,7 @@
           </p:nvSpPr>
           <p:spPr>
             <a:xfrm>
-              <a:off x="972874" y="5253655"/>
+              <a:off x="972874" y="5230442"/>
               <a:ext cx="7644336" cy="0"/>
             </a:xfrm>
             <a:custGeom>
@@ -2314,7 +2314,7 @@
           </p:nvSpPr>
           <p:spPr>
             <a:xfrm>
-              <a:off x="972874" y="4600121"/>
+              <a:off x="972874" y="4530481"/>
               <a:ext cx="7644336" cy="0"/>
             </a:xfrm>
             <a:custGeom>
@@ -2357,7 +2357,7 @@
           </p:nvSpPr>
           <p:spPr>
             <a:xfrm>
-              <a:off x="972874" y="3946587"/>
+              <a:off x="972874" y="3830521"/>
               <a:ext cx="7644336" cy="0"/>
             </a:xfrm>
             <a:custGeom>
@@ -2400,7 +2400,7 @@
           </p:nvSpPr>
           <p:spPr>
             <a:xfrm>
-              <a:off x="972874" y="3293053"/>
+              <a:off x="972874" y="3130560"/>
               <a:ext cx="7644336" cy="0"/>
             </a:xfrm>
             <a:custGeom>
@@ -2443,21 +2443,21 @@
           </p:nvSpPr>
           <p:spPr>
             <a:xfrm>
-              <a:off x="972874" y="2639519"/>
-              <a:ext cx="7644336" cy="0"/>
+              <a:off x="1641085" y="2583293"/>
+              <a:ext cx="0" cy="3139848"/>
             </a:xfrm>
             <a:custGeom>
               <a:avLst/>
               <a:pathLst>
-                <a:path w="7644336" h="0">
+                <a:path w="0" h="3139848">
                   <a:moveTo>
+                    <a:pt x="0" y="3139848"/>
+                  </a:moveTo>
+                  <a:lnTo>
                     <a:pt x="0" y="0"/>
-                  </a:moveTo>
-                  <a:lnTo>
-                    <a:pt x="7644336" y="0"/>
-                  </a:lnTo>
-                  <a:lnTo>
-                    <a:pt x="7644336" y="0"/>
+                  </a:lnTo>
+                  <a:lnTo>
+                    <a:pt x="0" y="0"/>
                   </a:lnTo>
                 </a:path>
               </a:pathLst>
@@ -2486,7 +2486,7 @@
           </p:nvSpPr>
           <p:spPr>
             <a:xfrm>
-              <a:off x="1641085" y="2583293"/>
+              <a:off x="3779361" y="2583293"/>
               <a:ext cx="0" cy="3139848"/>
             </a:xfrm>
             <a:custGeom>
@@ -2529,7 +2529,7 @@
           </p:nvSpPr>
           <p:spPr>
             <a:xfrm>
-              <a:off x="3779361" y="2583293"/>
+              <a:off x="5917637" y="2583293"/>
               <a:ext cx="0" cy="3139848"/>
             </a:xfrm>
             <a:custGeom>
@@ -2572,7 +2572,7 @@
           </p:nvSpPr>
           <p:spPr>
             <a:xfrm>
-              <a:off x="5917637" y="2583293"/>
+              <a:off x="8055913" y="2583293"/>
               <a:ext cx="0" cy="3139848"/>
             </a:xfrm>
             <a:custGeom>
@@ -2615,26 +2615,26 @@
           </p:nvSpPr>
           <p:spPr>
             <a:xfrm>
-              <a:off x="8055913" y="2583293"/>
-              <a:ext cx="0" cy="3139848"/>
+              <a:off x="972874" y="5580422"/>
+              <a:ext cx="7644336" cy="0"/>
             </a:xfrm>
             <a:custGeom>
               <a:avLst/>
               <a:pathLst>
-                <a:path w="0" h="3139848">
+                <a:path w="7644336" h="0">
                   <a:moveTo>
-                    <a:pt x="0" y="3139848"/>
+                    <a:pt x="0" y="0"/>
                   </a:moveTo>
                   <a:lnTo>
-                    <a:pt x="0" y="0"/>
-                  </a:lnTo>
-                  <a:lnTo>
-                    <a:pt x="0" y="0"/>
+                    <a:pt x="7644336" y="0"/>
+                  </a:lnTo>
+                  <a:lnTo>
+                    <a:pt x="7644336" y="0"/>
                   </a:lnTo>
                 </a:path>
               </a:pathLst>
             </a:custGeom>
-            <a:ln w="6775" cap="flat">
+            <a:ln w="13550" cap="flat">
               <a:solidFill>
                 <a:srgbClr val="EBEBEB">
                   <a:alpha val="100000"/>
@@ -2658,7 +2658,7 @@
           </p:nvSpPr>
           <p:spPr>
             <a:xfrm>
-              <a:off x="972874" y="5580422"/>
+              <a:off x="972874" y="4880461"/>
               <a:ext cx="7644336" cy="0"/>
             </a:xfrm>
             <a:custGeom>
@@ -2701,7 +2701,7 @@
           </p:nvSpPr>
           <p:spPr>
             <a:xfrm>
-              <a:off x="972874" y="4926888"/>
+              <a:off x="972874" y="4180501"/>
               <a:ext cx="7644336" cy="0"/>
             </a:xfrm>
             <a:custGeom>
@@ -2744,7 +2744,7 @@
           </p:nvSpPr>
           <p:spPr>
             <a:xfrm>
-              <a:off x="972874" y="4273354"/>
+              <a:off x="972874" y="3480541"/>
               <a:ext cx="7644336" cy="0"/>
             </a:xfrm>
             <a:custGeom>
@@ -2787,7 +2787,7 @@
           </p:nvSpPr>
           <p:spPr>
             <a:xfrm>
-              <a:off x="972874" y="3619820"/>
+              <a:off x="972874" y="2780580"/>
               <a:ext cx="7644336" cy="0"/>
             </a:xfrm>
             <a:custGeom>
@@ -2830,21 +2830,21 @@
           </p:nvSpPr>
           <p:spPr>
             <a:xfrm>
-              <a:off x="972874" y="2966286"/>
-              <a:ext cx="7644336" cy="0"/>
+              <a:off x="2710223" y="2583293"/>
+              <a:ext cx="0" cy="3139848"/>
             </a:xfrm>
             <a:custGeom>
               <a:avLst/>
               <a:pathLst>
-                <a:path w="7644336" h="0">
+                <a:path w="0" h="3139848">
                   <a:moveTo>
+                    <a:pt x="0" y="3139848"/>
+                  </a:moveTo>
+                  <a:lnTo>
                     <a:pt x="0" y="0"/>
-                  </a:moveTo>
-                  <a:lnTo>
-                    <a:pt x="7644336" y="0"/>
-                  </a:lnTo>
-                  <a:lnTo>
-                    <a:pt x="7644336" y="0"/>
+                  </a:lnTo>
+                  <a:lnTo>
+                    <a:pt x="0" y="0"/>
                   </a:lnTo>
                 </a:path>
               </a:pathLst>
@@ -2873,7 +2873,7 @@
           </p:nvSpPr>
           <p:spPr>
             <a:xfrm>
-              <a:off x="2710223" y="2583293"/>
+              <a:off x="4848499" y="2583293"/>
               <a:ext cx="0" cy="3139848"/>
             </a:xfrm>
             <a:custGeom>
@@ -2916,7 +2916,7 @@
           </p:nvSpPr>
           <p:spPr>
             <a:xfrm>
-              <a:off x="4848499" y="2583293"/>
+              <a:off x="6986775" y="2583293"/>
               <a:ext cx="0" cy="3139848"/>
             </a:xfrm>
             <a:custGeom>
@@ -2959,28 +2959,82 @@
           </p:nvSpPr>
           <p:spPr>
             <a:xfrm>
-              <a:off x="6986775" y="2583293"/>
-              <a:ext cx="0" cy="3139848"/>
+              <a:off x="1320344" y="4492090"/>
+              <a:ext cx="6949396" cy="1024006"/>
             </a:xfrm>
             <a:custGeom>
               <a:avLst/>
               <a:pathLst>
-                <a:path w="0" h="3139848">
+                <a:path w="6949396" h="1024006">
                   <a:moveTo>
-                    <a:pt x="0" y="3139848"/>
+                    <a:pt x="0" y="1024006"/>
                   </a:moveTo>
                   <a:lnTo>
-                    <a:pt x="0" y="0"/>
-                  </a:lnTo>
-                  <a:lnTo>
-                    <a:pt x="0" y="0"/>
+                    <a:pt x="106913" y="1024006"/>
+                  </a:lnTo>
+                  <a:lnTo>
+                    <a:pt x="106913" y="895839"/>
+                  </a:lnTo>
+                  <a:lnTo>
+                    <a:pt x="427655" y="895839"/>
+                  </a:lnTo>
+                  <a:lnTo>
+                    <a:pt x="427655" y="767702"/>
+                  </a:lnTo>
+                  <a:lnTo>
+                    <a:pt x="534568" y="767702"/>
+                  </a:lnTo>
+                  <a:lnTo>
+                    <a:pt x="534568" y="634931"/>
+                  </a:lnTo>
+                  <a:lnTo>
+                    <a:pt x="641482" y="634931"/>
+                  </a:lnTo>
+                  <a:lnTo>
+                    <a:pt x="641482" y="566086"/>
+                  </a:lnTo>
+                  <a:lnTo>
+                    <a:pt x="748396" y="566086"/>
+                  </a:lnTo>
+                  <a:lnTo>
+                    <a:pt x="748396" y="496509"/>
+                  </a:lnTo>
+                  <a:lnTo>
+                    <a:pt x="2459017" y="496509"/>
+                  </a:lnTo>
+                  <a:lnTo>
+                    <a:pt x="2459017" y="289725"/>
+                  </a:lnTo>
+                  <a:lnTo>
+                    <a:pt x="2886672" y="289725"/>
+                  </a:lnTo>
+                  <a:lnTo>
+                    <a:pt x="2886672" y="218806"/>
+                  </a:lnTo>
+                  <a:lnTo>
+                    <a:pt x="3741982" y="218806"/>
+                  </a:lnTo>
+                  <a:lnTo>
+                    <a:pt x="3741982" y="146503"/>
+                  </a:lnTo>
+                  <a:lnTo>
+                    <a:pt x="3848896" y="146503"/>
+                  </a:lnTo>
+                  <a:lnTo>
+                    <a:pt x="3848896" y="73825"/>
+                  </a:lnTo>
+                  <a:lnTo>
+                    <a:pt x="6949396" y="73825"/>
+                  </a:lnTo>
+                  <a:lnTo>
+                    <a:pt x="6949396" y="0"/>
                   </a:lnTo>
                 </a:path>
               </a:pathLst>
             </a:custGeom>
-            <a:ln w="13550" cap="flat">
+            <a:ln w="27101" cap="flat">
               <a:solidFill>
-                <a:srgbClr val="EBEBEB">
+                <a:srgbClr val="1F78B4">
                   <a:alpha val="100000"/>
                 </a:srgbClr>
               </a:solidFill>
@@ -3002,169 +3056,72 @@
           </p:nvSpPr>
           <p:spPr>
             <a:xfrm>
-              <a:off x="1320344" y="4615919"/>
-              <a:ext cx="6949396" cy="907618"/>
+              <a:off x="1320344" y="2861938"/>
+              <a:ext cx="6949396" cy="2542684"/>
             </a:xfrm>
             <a:custGeom>
               <a:avLst/>
               <a:pathLst>
-                <a:path w="6949396" h="907618">
+                <a:path w="6949396" h="2542684">
                   <a:moveTo>
-                    <a:pt x="0" y="907618"/>
+                    <a:pt x="0" y="2542684"/>
                   </a:moveTo>
                   <a:lnTo>
-                    <a:pt x="106913" y="907618"/>
-                  </a:lnTo>
-                  <a:lnTo>
-                    <a:pt x="106913" y="794183"/>
-                  </a:lnTo>
-                  <a:lnTo>
-                    <a:pt x="427655" y="794183"/>
-                  </a:lnTo>
-                  <a:lnTo>
-                    <a:pt x="427655" y="680961"/>
-                  </a:lnTo>
-                  <a:lnTo>
-                    <a:pt x="534568" y="680961"/>
-                  </a:lnTo>
-                  <a:lnTo>
-                    <a:pt x="534568" y="563161"/>
-                  </a:lnTo>
-                  <a:lnTo>
-                    <a:pt x="641482" y="563161"/>
-                  </a:lnTo>
-                  <a:lnTo>
-                    <a:pt x="641482" y="501986"/>
-                  </a:lnTo>
-                  <a:lnTo>
-                    <a:pt x="748396" y="501986"/>
-                  </a:lnTo>
-                  <a:lnTo>
-                    <a:pt x="748396" y="440307"/>
-                  </a:lnTo>
-                  <a:lnTo>
-                    <a:pt x="2459017" y="440307"/>
-                  </a:lnTo>
-                  <a:lnTo>
-                    <a:pt x="2459017" y="256588"/>
-                  </a:lnTo>
-                  <a:lnTo>
-                    <a:pt x="2886672" y="256588"/>
-                  </a:lnTo>
-                  <a:lnTo>
-                    <a:pt x="2886672" y="193804"/>
-                  </a:lnTo>
-                  <a:lnTo>
-                    <a:pt x="3741982" y="193804"/>
-                  </a:lnTo>
-                  <a:lnTo>
-                    <a:pt x="3741982" y="129668"/>
-                  </a:lnTo>
-                  <a:lnTo>
-                    <a:pt x="3848896" y="129668"/>
-                  </a:lnTo>
-                  <a:lnTo>
-                    <a:pt x="3848896" y="65288"/>
-                  </a:lnTo>
-                  <a:lnTo>
-                    <a:pt x="6949396" y="65288"/>
-                  </a:lnTo>
-                  <a:lnTo>
-                    <a:pt x="6949396" y="0"/>
-                  </a:lnTo>
-                </a:path>
-              </a:pathLst>
-            </a:custGeom>
-            <a:ln w="27101" cap="flat">
-              <a:solidFill>
-                <a:srgbClr val="1F78B4">
-                  <a:alpha val="100000"/>
-                </a:srgbClr>
-              </a:solidFill>
-              <a:prstDash val="solid"/>
-              <a:round/>
-            </a:ln>
-          </p:spPr>
-          <p:txBody>
-            <a:bodyPr/>
-            <a:lstStyle/>
-            <a:p/>
-          </p:txBody>
-        </p:sp>
-        <p:sp>
-          <p:nvSpPr>
-            <p:cNvPr id="22" name="pl22"/>
-            <p:cNvSpPr/>
-            <p:nvPr/>
-          </p:nvSpPr>
-          <p:spPr>
-            <a:xfrm>
-              <a:off x="1320344" y="2861938"/>
-              <a:ext cx="6949396" cy="2544168"/>
-            </a:xfrm>
-            <a:custGeom>
-              <a:avLst/>
-              <a:pathLst>
-                <a:path w="6949396" h="2544168">
-                  <a:moveTo>
-                    <a:pt x="0" y="2544168"/>
-                  </a:moveTo>
-                  <a:lnTo>
-                    <a:pt x="106913" y="2544168"/>
-                  </a:lnTo>
-                  <a:lnTo>
-                    <a:pt x="106913" y="2202021"/>
-                  </a:lnTo>
-                  <a:lnTo>
-                    <a:pt x="427655" y="2202021"/>
-                  </a:lnTo>
-                  <a:lnTo>
-                    <a:pt x="427655" y="1867656"/>
-                  </a:lnTo>
-                  <a:lnTo>
-                    <a:pt x="534568" y="1867656"/>
-                  </a:lnTo>
-                  <a:lnTo>
-                    <a:pt x="534568" y="1527205"/>
-                  </a:lnTo>
-                  <a:lnTo>
-                    <a:pt x="641482" y="1527205"/>
-                  </a:lnTo>
-                  <a:lnTo>
-                    <a:pt x="641482" y="1353346"/>
-                  </a:lnTo>
-                  <a:lnTo>
-                    <a:pt x="748396" y="1353346"/>
-                  </a:lnTo>
-                  <a:lnTo>
-                    <a:pt x="748396" y="1180068"/>
-                  </a:lnTo>
-                  <a:lnTo>
-                    <a:pt x="2459017" y="1180068"/>
-                  </a:lnTo>
-                  <a:lnTo>
-                    <a:pt x="2459017" y="675704"/>
-                  </a:lnTo>
-                  <a:lnTo>
-                    <a:pt x="2886672" y="675704"/>
-                  </a:lnTo>
-                  <a:lnTo>
-                    <a:pt x="2886672" y="507316"/>
-                  </a:lnTo>
-                  <a:lnTo>
-                    <a:pt x="3741982" y="507316"/>
-                  </a:lnTo>
-                  <a:lnTo>
-                    <a:pt x="3741982" y="337358"/>
-                  </a:lnTo>
-                  <a:lnTo>
-                    <a:pt x="3848896" y="337358"/>
-                  </a:lnTo>
-                  <a:lnTo>
-                    <a:pt x="3848896" y="168819"/>
-                  </a:lnTo>
-                  <a:lnTo>
-                    <a:pt x="6949396" y="168819"/>
+                    <a:pt x="106913" y="2542684"/>
+                  </a:lnTo>
+                  <a:lnTo>
+                    <a:pt x="106913" y="2198251"/>
+                  </a:lnTo>
+                  <a:lnTo>
+                    <a:pt x="427655" y="2198251"/>
+                  </a:lnTo>
+                  <a:lnTo>
+                    <a:pt x="427655" y="1861588"/>
+                  </a:lnTo>
+                  <a:lnTo>
+                    <a:pt x="534568" y="1861588"/>
+                  </a:lnTo>
+                  <a:lnTo>
+                    <a:pt x="534568" y="1520756"/>
+                  </a:lnTo>
+                  <a:lnTo>
+                    <a:pt x="641482" y="1520756"/>
+                  </a:lnTo>
+                  <a:lnTo>
+                    <a:pt x="641482" y="1347197"/>
+                  </a:lnTo>
+                  <a:lnTo>
+                    <a:pt x="748396" y="1347197"/>
+                  </a:lnTo>
+                  <a:lnTo>
+                    <a:pt x="748396" y="1173970"/>
+                  </a:lnTo>
+                  <a:lnTo>
+                    <a:pt x="2459017" y="1173970"/>
+                  </a:lnTo>
+                  <a:lnTo>
+                    <a:pt x="2459017" y="671916"/>
+                  </a:lnTo>
+                  <a:lnTo>
+                    <a:pt x="2886672" y="671916"/>
+                  </a:lnTo>
+                  <a:lnTo>
+                    <a:pt x="2886672" y="504077"/>
+                  </a:lnTo>
+                  <a:lnTo>
+                    <a:pt x="3741982" y="504077"/>
+                  </a:lnTo>
+                  <a:lnTo>
+                    <a:pt x="3741982" y="335223"/>
+                  </a:lnTo>
+                  <a:lnTo>
+                    <a:pt x="3848896" y="335223"/>
+                  </a:lnTo>
+                  <a:lnTo>
+                    <a:pt x="3848896" y="167772"/>
+                  </a:lnTo>
+                  <a:lnTo>
+                    <a:pt x="6949396" y="167772"/>
                   </a:lnTo>
                   <a:lnTo>
                     <a:pt x="6949396" y="0"/>
@@ -3190,7 +3147,7 @@
         </p:sp>
         <p:sp>
           <p:nvSpPr>
-            <p:cNvPr id="23" name="tx23"/>
+            <p:cNvPr id="22" name="tx22"/>
             <p:cNvSpPr/>
             <p:nvPr/>
           </p:nvSpPr>
@@ -3236,13 +3193,13 @@
         </p:sp>
         <p:sp>
           <p:nvSpPr>
-            <p:cNvPr id="24" name="tx24"/>
+            <p:cNvPr id="23" name="tx23"/>
             <p:cNvSpPr/>
             <p:nvPr/>
           </p:nvSpPr>
           <p:spPr>
             <a:xfrm>
-              <a:off x="692708" y="4886837"/>
+              <a:off x="692708" y="4840411"/>
               <a:ext cx="217535" cy="80101"/>
             </a:xfrm>
             <a:prstGeom prst="rect">
@@ -3282,13 +3239,13 @@
         </p:sp>
         <p:sp>
           <p:nvSpPr>
-            <p:cNvPr id="25" name="tx25"/>
+            <p:cNvPr id="24" name="tx24"/>
             <p:cNvSpPr/>
             <p:nvPr/>
           </p:nvSpPr>
           <p:spPr>
             <a:xfrm>
-              <a:off x="692708" y="4233303"/>
+              <a:off x="692708" y="4140450"/>
               <a:ext cx="217535" cy="80101"/>
             </a:xfrm>
             <a:prstGeom prst="rect">
@@ -3328,13 +3285,13 @@
         </p:sp>
         <p:sp>
           <p:nvSpPr>
-            <p:cNvPr id="26" name="tx26"/>
+            <p:cNvPr id="25" name="tx25"/>
             <p:cNvSpPr/>
             <p:nvPr/>
           </p:nvSpPr>
           <p:spPr>
             <a:xfrm>
-              <a:off x="692708" y="3579769"/>
+              <a:off x="692708" y="3440490"/>
               <a:ext cx="217535" cy="80101"/>
             </a:xfrm>
             <a:prstGeom prst="rect">
@@ -3374,13 +3331,13 @@
         </p:sp>
         <p:sp>
           <p:nvSpPr>
-            <p:cNvPr id="27" name="tx27"/>
+            <p:cNvPr id="26" name="tx26"/>
             <p:cNvSpPr/>
             <p:nvPr/>
           </p:nvSpPr>
           <p:spPr>
             <a:xfrm>
-              <a:off x="692708" y="2926235"/>
+              <a:off x="692708" y="2740530"/>
               <a:ext cx="217535" cy="80101"/>
             </a:xfrm>
             <a:prstGeom prst="rect">
@@ -3420,7 +3377,7 @@
         </p:sp>
         <p:sp>
           <p:nvSpPr>
-            <p:cNvPr id="28" name="tx28"/>
+            <p:cNvPr id="27" name="tx27"/>
             <p:cNvSpPr/>
             <p:nvPr/>
           </p:nvSpPr>
@@ -3466,7 +3423,7 @@
         </p:sp>
         <p:sp>
           <p:nvSpPr>
-            <p:cNvPr id="29" name="tx29"/>
+            <p:cNvPr id="28" name="tx28"/>
             <p:cNvSpPr/>
             <p:nvPr/>
           </p:nvSpPr>
@@ -3512,7 +3469,7 @@
         </p:sp>
         <p:sp>
           <p:nvSpPr>
-            <p:cNvPr id="30" name="tx30"/>
+            <p:cNvPr id="29" name="tx29"/>
             <p:cNvSpPr/>
             <p:nvPr/>
           </p:nvSpPr>
@@ -3558,7 +3515,7 @@
         </p:sp>
         <p:sp>
           <p:nvSpPr>
-            <p:cNvPr id="31" name="tx31"/>
+            <p:cNvPr id="30" name="tx30"/>
             <p:cNvSpPr/>
             <p:nvPr/>
           </p:nvSpPr>
@@ -3604,7 +3561,7 @@
         </p:sp>
         <p:sp>
           <p:nvSpPr>
-            <p:cNvPr id="32" name="tx32"/>
+            <p:cNvPr id="31" name="tx31"/>
             <p:cNvSpPr/>
             <p:nvPr/>
           </p:nvSpPr>
@@ -3650,7 +3607,7 @@
         </p:sp>
         <p:sp>
           <p:nvSpPr>
-            <p:cNvPr id="33" name="pl33"/>
+            <p:cNvPr id="32" name="pl32"/>
             <p:cNvSpPr/>
             <p:nvPr/>
           </p:nvSpPr>
@@ -3690,7 +3647,7 @@
         </p:sp>
         <p:sp>
           <p:nvSpPr>
-            <p:cNvPr id="34" name="pl34"/>
+            <p:cNvPr id="33" name="pl33"/>
             <p:cNvSpPr/>
             <p:nvPr/>
           </p:nvSpPr>
@@ -3730,7 +3687,7 @@
         </p:sp>
         <p:sp>
           <p:nvSpPr>
-            <p:cNvPr id="35" name="tx35"/>
+            <p:cNvPr id="34" name="tx34"/>
             <p:cNvSpPr/>
             <p:nvPr/>
           </p:nvSpPr>
@@ -3776,7 +3733,7 @@
         </p:sp>
         <p:sp>
           <p:nvSpPr>
-            <p:cNvPr id="36" name="tx36"/>
+            <p:cNvPr id="35" name="tx35"/>
             <p:cNvSpPr/>
             <p:nvPr/>
           </p:nvSpPr>
@@ -3822,14 +3779,14 @@
         </p:sp>
         <p:sp>
           <p:nvSpPr>
-            <p:cNvPr id="37" name="tx37"/>
+            <p:cNvPr id="36" name="tx36"/>
             <p:cNvSpPr/>
             <p:nvPr/>
           </p:nvSpPr>
           <p:spPr>
             <a:xfrm>
               <a:off x="972874" y="1896563"/>
-              <a:ext cx="3984498" cy="91165"/>
+              <a:ext cx="3913906" cy="91165"/>
             </a:xfrm>
             <a:prstGeom prst="rect">
               <a:avLst/>
@@ -3861,14 +3818,14 @@
                   <a:latin typeface="Helvetica"/>
                   <a:cs typeface="Helvetica"/>
                 </a:rPr>
-                <a:t>Discrep &gt;= +25 vs &lt;+25: subHR = 3.08 (95% CI 0.88-10.74), p = 0.077</a:t>
+                <a:t>Discrep &gt;= +25 vs &lt;+25: subHR = 2.75 (95% CI 0.86-8.76), p = 0.088</a:t>
               </a:r>
             </a:p>
           </p:txBody>
         </p:sp>
         <p:sp>
           <p:nvSpPr>
-            <p:cNvPr id="38" name="tx38"/>
+            <p:cNvPr id="37" name="tx37"/>
             <p:cNvSpPr/>
             <p:nvPr/>
           </p:nvSpPr>

--- a/docs/plots/carbo/jx_carbo_adjcif_throm2.pptx
+++ b/docs/plots/carbo/jx_carbo_adjcif_throm2.pptx
@@ -2271,7 +2271,7 @@
           </p:nvSpPr>
           <p:spPr>
             <a:xfrm>
-              <a:off x="972874" y="5230442"/>
+              <a:off x="972874" y="5253655"/>
               <a:ext cx="7644336" cy="0"/>
             </a:xfrm>
             <a:custGeom>
@@ -2314,7 +2314,7 @@
           </p:nvSpPr>
           <p:spPr>
             <a:xfrm>
-              <a:off x="972874" y="4530481"/>
+              <a:off x="972874" y="4600121"/>
               <a:ext cx="7644336" cy="0"/>
             </a:xfrm>
             <a:custGeom>
@@ -2357,7 +2357,7 @@
           </p:nvSpPr>
           <p:spPr>
             <a:xfrm>
-              <a:off x="972874" y="3830521"/>
+              <a:off x="972874" y="3946587"/>
               <a:ext cx="7644336" cy="0"/>
             </a:xfrm>
             <a:custGeom>
@@ -2400,7 +2400,7 @@
           </p:nvSpPr>
           <p:spPr>
             <a:xfrm>
-              <a:off x="972874" y="3130560"/>
+              <a:off x="972874" y="3293053"/>
               <a:ext cx="7644336" cy="0"/>
             </a:xfrm>
             <a:custGeom>
@@ -2443,21 +2443,21 @@
           </p:nvSpPr>
           <p:spPr>
             <a:xfrm>
-              <a:off x="1641085" y="2583293"/>
-              <a:ext cx="0" cy="3139848"/>
+              <a:off x="972874" y="2639519"/>
+              <a:ext cx="7644336" cy="0"/>
             </a:xfrm>
             <a:custGeom>
               <a:avLst/>
               <a:pathLst>
-                <a:path w="0" h="3139848">
+                <a:path w="7644336" h="0">
                   <a:moveTo>
-                    <a:pt x="0" y="3139848"/>
+                    <a:pt x="0" y="0"/>
                   </a:moveTo>
                   <a:lnTo>
-                    <a:pt x="0" y="0"/>
-                  </a:lnTo>
-                  <a:lnTo>
-                    <a:pt x="0" y="0"/>
+                    <a:pt x="7644336" y="0"/>
+                  </a:lnTo>
+                  <a:lnTo>
+                    <a:pt x="7644336" y="0"/>
                   </a:lnTo>
                 </a:path>
               </a:pathLst>
@@ -2486,7 +2486,7 @@
           </p:nvSpPr>
           <p:spPr>
             <a:xfrm>
-              <a:off x="3779361" y="2583293"/>
+              <a:off x="1641085" y="2583293"/>
               <a:ext cx="0" cy="3139848"/>
             </a:xfrm>
             <a:custGeom>
@@ -2529,7 +2529,7 @@
           </p:nvSpPr>
           <p:spPr>
             <a:xfrm>
-              <a:off x="5917637" y="2583293"/>
+              <a:off x="3779361" y="2583293"/>
               <a:ext cx="0" cy="3139848"/>
             </a:xfrm>
             <a:custGeom>
@@ -2572,7 +2572,7 @@
           </p:nvSpPr>
           <p:spPr>
             <a:xfrm>
-              <a:off x="8055913" y="2583293"/>
+              <a:off x="5917637" y="2583293"/>
               <a:ext cx="0" cy="3139848"/>
             </a:xfrm>
             <a:custGeom>
@@ -2615,26 +2615,26 @@
           </p:nvSpPr>
           <p:spPr>
             <a:xfrm>
-              <a:off x="972874" y="5580422"/>
-              <a:ext cx="7644336" cy="0"/>
+              <a:off x="8055913" y="2583293"/>
+              <a:ext cx="0" cy="3139848"/>
             </a:xfrm>
             <a:custGeom>
               <a:avLst/>
               <a:pathLst>
-                <a:path w="7644336" h="0">
+                <a:path w="0" h="3139848">
                   <a:moveTo>
+                    <a:pt x="0" y="3139848"/>
+                  </a:moveTo>
+                  <a:lnTo>
                     <a:pt x="0" y="0"/>
-                  </a:moveTo>
-                  <a:lnTo>
-                    <a:pt x="7644336" y="0"/>
-                  </a:lnTo>
-                  <a:lnTo>
-                    <a:pt x="7644336" y="0"/>
+                  </a:lnTo>
+                  <a:lnTo>
+                    <a:pt x="0" y="0"/>
                   </a:lnTo>
                 </a:path>
               </a:pathLst>
             </a:custGeom>
-            <a:ln w="13550" cap="flat">
+            <a:ln w="6775" cap="flat">
               <a:solidFill>
                 <a:srgbClr val="EBEBEB">
                   <a:alpha val="100000"/>
@@ -2658,7 +2658,7 @@
           </p:nvSpPr>
           <p:spPr>
             <a:xfrm>
-              <a:off x="972874" y="4880461"/>
+              <a:off x="972874" y="5580422"/>
               <a:ext cx="7644336" cy="0"/>
             </a:xfrm>
             <a:custGeom>
@@ -2701,7 +2701,7 @@
           </p:nvSpPr>
           <p:spPr>
             <a:xfrm>
-              <a:off x="972874" y="4180501"/>
+              <a:off x="972874" y="4926888"/>
               <a:ext cx="7644336" cy="0"/>
             </a:xfrm>
             <a:custGeom>
@@ -2744,7 +2744,7 @@
           </p:nvSpPr>
           <p:spPr>
             <a:xfrm>
-              <a:off x="972874" y="3480541"/>
+              <a:off x="972874" y="4273354"/>
               <a:ext cx="7644336" cy="0"/>
             </a:xfrm>
             <a:custGeom>
@@ -2787,7 +2787,7 @@
           </p:nvSpPr>
           <p:spPr>
             <a:xfrm>
-              <a:off x="972874" y="2780580"/>
+              <a:off x="972874" y="3619820"/>
               <a:ext cx="7644336" cy="0"/>
             </a:xfrm>
             <a:custGeom>
@@ -2830,21 +2830,21 @@
           </p:nvSpPr>
           <p:spPr>
             <a:xfrm>
-              <a:off x="2710223" y="2583293"/>
-              <a:ext cx="0" cy="3139848"/>
+              <a:off x="972874" y="2966286"/>
+              <a:ext cx="7644336" cy="0"/>
             </a:xfrm>
             <a:custGeom>
               <a:avLst/>
               <a:pathLst>
-                <a:path w="0" h="3139848">
+                <a:path w="7644336" h="0">
                   <a:moveTo>
-                    <a:pt x="0" y="3139848"/>
+                    <a:pt x="0" y="0"/>
                   </a:moveTo>
                   <a:lnTo>
-                    <a:pt x="0" y="0"/>
-                  </a:lnTo>
-                  <a:lnTo>
-                    <a:pt x="0" y="0"/>
+                    <a:pt x="7644336" y="0"/>
+                  </a:lnTo>
+                  <a:lnTo>
+                    <a:pt x="7644336" y="0"/>
                   </a:lnTo>
                 </a:path>
               </a:pathLst>
@@ -2873,7 +2873,7 @@
           </p:nvSpPr>
           <p:spPr>
             <a:xfrm>
-              <a:off x="4848499" y="2583293"/>
+              <a:off x="2710223" y="2583293"/>
               <a:ext cx="0" cy="3139848"/>
             </a:xfrm>
             <a:custGeom>
@@ -2916,7 +2916,7 @@
           </p:nvSpPr>
           <p:spPr>
             <a:xfrm>
-              <a:off x="6986775" y="2583293"/>
+              <a:off x="4848499" y="2583293"/>
               <a:ext cx="0" cy="3139848"/>
             </a:xfrm>
             <a:custGeom>
@@ -2959,72 +2959,115 @@
           </p:nvSpPr>
           <p:spPr>
             <a:xfrm>
-              <a:off x="1320344" y="4492090"/>
-              <a:ext cx="6949396" cy="1024006"/>
+              <a:off x="6986775" y="2583293"/>
+              <a:ext cx="0" cy="3139848"/>
             </a:xfrm>
             <a:custGeom>
               <a:avLst/>
               <a:pathLst>
-                <a:path w="6949396" h="1024006">
+                <a:path w="0" h="3139848">
                   <a:moveTo>
-                    <a:pt x="0" y="1024006"/>
+                    <a:pt x="0" y="3139848"/>
                   </a:moveTo>
                   <a:lnTo>
-                    <a:pt x="106913" y="1024006"/>
-                  </a:lnTo>
-                  <a:lnTo>
-                    <a:pt x="106913" y="895839"/>
-                  </a:lnTo>
-                  <a:lnTo>
-                    <a:pt x="427655" y="895839"/>
-                  </a:lnTo>
-                  <a:lnTo>
-                    <a:pt x="427655" y="767702"/>
-                  </a:lnTo>
-                  <a:lnTo>
-                    <a:pt x="534568" y="767702"/>
-                  </a:lnTo>
-                  <a:lnTo>
-                    <a:pt x="534568" y="634931"/>
-                  </a:lnTo>
-                  <a:lnTo>
-                    <a:pt x="641482" y="634931"/>
-                  </a:lnTo>
-                  <a:lnTo>
-                    <a:pt x="641482" y="566086"/>
-                  </a:lnTo>
-                  <a:lnTo>
-                    <a:pt x="748396" y="566086"/>
-                  </a:lnTo>
-                  <a:lnTo>
-                    <a:pt x="748396" y="496509"/>
-                  </a:lnTo>
-                  <a:lnTo>
-                    <a:pt x="2459017" y="496509"/>
-                  </a:lnTo>
-                  <a:lnTo>
-                    <a:pt x="2459017" y="289725"/>
-                  </a:lnTo>
-                  <a:lnTo>
-                    <a:pt x="2886672" y="289725"/>
-                  </a:lnTo>
-                  <a:lnTo>
-                    <a:pt x="2886672" y="218806"/>
-                  </a:lnTo>
-                  <a:lnTo>
-                    <a:pt x="3741982" y="218806"/>
-                  </a:lnTo>
-                  <a:lnTo>
-                    <a:pt x="3741982" y="146503"/>
-                  </a:lnTo>
-                  <a:lnTo>
-                    <a:pt x="3848896" y="146503"/>
-                  </a:lnTo>
-                  <a:lnTo>
-                    <a:pt x="3848896" y="73825"/>
-                  </a:lnTo>
-                  <a:lnTo>
-                    <a:pt x="6949396" y="73825"/>
+                    <a:pt x="0" y="0"/>
+                  </a:lnTo>
+                  <a:lnTo>
+                    <a:pt x="0" y="0"/>
+                  </a:lnTo>
+                </a:path>
+              </a:pathLst>
+            </a:custGeom>
+            <a:ln w="13550" cap="flat">
+              <a:solidFill>
+                <a:srgbClr val="EBEBEB">
+                  <a:alpha val="100000"/>
+                </a:srgbClr>
+              </a:solidFill>
+              <a:prstDash val="solid"/>
+              <a:round/>
+            </a:ln>
+          </p:spPr>
+          <p:txBody>
+            <a:bodyPr/>
+            <a:lstStyle/>
+            <a:p/>
+          </p:txBody>
+        </p:sp>
+        <p:sp>
+          <p:nvSpPr>
+            <p:cNvPr id="21" name="pl21"/>
+            <p:cNvSpPr/>
+            <p:nvPr/>
+          </p:nvSpPr>
+          <p:spPr>
+            <a:xfrm>
+              <a:off x="1320344" y="4615919"/>
+              <a:ext cx="6949396" cy="907618"/>
+            </a:xfrm>
+            <a:custGeom>
+              <a:avLst/>
+              <a:pathLst>
+                <a:path w="6949396" h="907618">
+                  <a:moveTo>
+                    <a:pt x="0" y="907618"/>
+                  </a:moveTo>
+                  <a:lnTo>
+                    <a:pt x="106913" y="907618"/>
+                  </a:lnTo>
+                  <a:lnTo>
+                    <a:pt x="106913" y="794183"/>
+                  </a:lnTo>
+                  <a:lnTo>
+                    <a:pt x="427655" y="794183"/>
+                  </a:lnTo>
+                  <a:lnTo>
+                    <a:pt x="427655" y="680961"/>
+                  </a:lnTo>
+                  <a:lnTo>
+                    <a:pt x="534568" y="680961"/>
+                  </a:lnTo>
+                  <a:lnTo>
+                    <a:pt x="534568" y="563161"/>
+                  </a:lnTo>
+                  <a:lnTo>
+                    <a:pt x="641482" y="563161"/>
+                  </a:lnTo>
+                  <a:lnTo>
+                    <a:pt x="641482" y="501986"/>
+                  </a:lnTo>
+                  <a:lnTo>
+                    <a:pt x="748396" y="501986"/>
+                  </a:lnTo>
+                  <a:lnTo>
+                    <a:pt x="748396" y="440307"/>
+                  </a:lnTo>
+                  <a:lnTo>
+                    <a:pt x="2459017" y="440307"/>
+                  </a:lnTo>
+                  <a:lnTo>
+                    <a:pt x="2459017" y="256588"/>
+                  </a:lnTo>
+                  <a:lnTo>
+                    <a:pt x="2886672" y="256588"/>
+                  </a:lnTo>
+                  <a:lnTo>
+                    <a:pt x="2886672" y="193804"/>
+                  </a:lnTo>
+                  <a:lnTo>
+                    <a:pt x="3741982" y="193804"/>
+                  </a:lnTo>
+                  <a:lnTo>
+                    <a:pt x="3741982" y="129668"/>
+                  </a:lnTo>
+                  <a:lnTo>
+                    <a:pt x="3848896" y="129668"/>
+                  </a:lnTo>
+                  <a:lnTo>
+                    <a:pt x="3848896" y="65288"/>
+                  </a:lnTo>
+                  <a:lnTo>
+                    <a:pt x="6949396" y="65288"/>
                   </a:lnTo>
                   <a:lnTo>
                     <a:pt x="6949396" y="0"/>
@@ -3050,78 +3093,78 @@
         </p:sp>
         <p:sp>
           <p:nvSpPr>
-            <p:cNvPr id="21" name="pl21"/>
+            <p:cNvPr id="22" name="pl22"/>
             <p:cNvSpPr/>
             <p:nvPr/>
           </p:nvSpPr>
           <p:spPr>
             <a:xfrm>
               <a:off x="1320344" y="2861938"/>
-              <a:ext cx="6949396" cy="2542684"/>
+              <a:ext cx="6949396" cy="2544168"/>
             </a:xfrm>
             <a:custGeom>
               <a:avLst/>
               <a:pathLst>
-                <a:path w="6949396" h="2542684">
+                <a:path w="6949396" h="2544168">
                   <a:moveTo>
-                    <a:pt x="0" y="2542684"/>
+                    <a:pt x="0" y="2544168"/>
                   </a:moveTo>
                   <a:lnTo>
-                    <a:pt x="106913" y="2542684"/>
-                  </a:lnTo>
-                  <a:lnTo>
-                    <a:pt x="106913" y="2198251"/>
-                  </a:lnTo>
-                  <a:lnTo>
-                    <a:pt x="427655" y="2198251"/>
-                  </a:lnTo>
-                  <a:lnTo>
-                    <a:pt x="427655" y="1861588"/>
-                  </a:lnTo>
-                  <a:lnTo>
-                    <a:pt x="534568" y="1861588"/>
-                  </a:lnTo>
-                  <a:lnTo>
-                    <a:pt x="534568" y="1520756"/>
-                  </a:lnTo>
-                  <a:lnTo>
-                    <a:pt x="641482" y="1520756"/>
-                  </a:lnTo>
-                  <a:lnTo>
-                    <a:pt x="641482" y="1347197"/>
-                  </a:lnTo>
-                  <a:lnTo>
-                    <a:pt x="748396" y="1347197"/>
-                  </a:lnTo>
-                  <a:lnTo>
-                    <a:pt x="748396" y="1173970"/>
-                  </a:lnTo>
-                  <a:lnTo>
-                    <a:pt x="2459017" y="1173970"/>
-                  </a:lnTo>
-                  <a:lnTo>
-                    <a:pt x="2459017" y="671916"/>
-                  </a:lnTo>
-                  <a:lnTo>
-                    <a:pt x="2886672" y="671916"/>
-                  </a:lnTo>
-                  <a:lnTo>
-                    <a:pt x="2886672" y="504077"/>
-                  </a:lnTo>
-                  <a:lnTo>
-                    <a:pt x="3741982" y="504077"/>
-                  </a:lnTo>
-                  <a:lnTo>
-                    <a:pt x="3741982" y="335223"/>
-                  </a:lnTo>
-                  <a:lnTo>
-                    <a:pt x="3848896" y="335223"/>
-                  </a:lnTo>
-                  <a:lnTo>
-                    <a:pt x="3848896" y="167772"/>
-                  </a:lnTo>
-                  <a:lnTo>
-                    <a:pt x="6949396" y="167772"/>
+                    <a:pt x="106913" y="2544168"/>
+                  </a:lnTo>
+                  <a:lnTo>
+                    <a:pt x="106913" y="2202021"/>
+                  </a:lnTo>
+                  <a:lnTo>
+                    <a:pt x="427655" y="2202021"/>
+                  </a:lnTo>
+                  <a:lnTo>
+                    <a:pt x="427655" y="1867656"/>
+                  </a:lnTo>
+                  <a:lnTo>
+                    <a:pt x="534568" y="1867656"/>
+                  </a:lnTo>
+                  <a:lnTo>
+                    <a:pt x="534568" y="1527205"/>
+                  </a:lnTo>
+                  <a:lnTo>
+                    <a:pt x="641482" y="1527205"/>
+                  </a:lnTo>
+                  <a:lnTo>
+                    <a:pt x="641482" y="1353346"/>
+                  </a:lnTo>
+                  <a:lnTo>
+                    <a:pt x="748396" y="1353346"/>
+                  </a:lnTo>
+                  <a:lnTo>
+                    <a:pt x="748396" y="1180068"/>
+                  </a:lnTo>
+                  <a:lnTo>
+                    <a:pt x="2459017" y="1180068"/>
+                  </a:lnTo>
+                  <a:lnTo>
+                    <a:pt x="2459017" y="675704"/>
+                  </a:lnTo>
+                  <a:lnTo>
+                    <a:pt x="2886672" y="675704"/>
+                  </a:lnTo>
+                  <a:lnTo>
+                    <a:pt x="2886672" y="507316"/>
+                  </a:lnTo>
+                  <a:lnTo>
+                    <a:pt x="3741982" y="507316"/>
+                  </a:lnTo>
+                  <a:lnTo>
+                    <a:pt x="3741982" y="337358"/>
+                  </a:lnTo>
+                  <a:lnTo>
+                    <a:pt x="3848896" y="337358"/>
+                  </a:lnTo>
+                  <a:lnTo>
+                    <a:pt x="3848896" y="168819"/>
+                  </a:lnTo>
+                  <a:lnTo>
+                    <a:pt x="6949396" y="168819"/>
                   </a:lnTo>
                   <a:lnTo>
                     <a:pt x="6949396" y="0"/>
@@ -3147,7 +3190,7 @@
         </p:sp>
         <p:sp>
           <p:nvSpPr>
-            <p:cNvPr id="22" name="tx22"/>
+            <p:cNvPr id="23" name="tx23"/>
             <p:cNvSpPr/>
             <p:nvPr/>
           </p:nvSpPr>
@@ -3193,13 +3236,13 @@
         </p:sp>
         <p:sp>
           <p:nvSpPr>
-            <p:cNvPr id="23" name="tx23"/>
+            <p:cNvPr id="24" name="tx24"/>
             <p:cNvSpPr/>
             <p:nvPr/>
           </p:nvSpPr>
           <p:spPr>
             <a:xfrm>
-              <a:off x="692708" y="4840411"/>
+              <a:off x="692708" y="4886837"/>
               <a:ext cx="217535" cy="80101"/>
             </a:xfrm>
             <a:prstGeom prst="rect">
@@ -3239,13 +3282,13 @@
         </p:sp>
         <p:sp>
           <p:nvSpPr>
-            <p:cNvPr id="24" name="tx24"/>
+            <p:cNvPr id="25" name="tx25"/>
             <p:cNvSpPr/>
             <p:nvPr/>
           </p:nvSpPr>
           <p:spPr>
             <a:xfrm>
-              <a:off x="692708" y="4140450"/>
+              <a:off x="692708" y="4233303"/>
               <a:ext cx="217535" cy="80101"/>
             </a:xfrm>
             <a:prstGeom prst="rect">
@@ -3285,13 +3328,13 @@
         </p:sp>
         <p:sp>
           <p:nvSpPr>
-            <p:cNvPr id="25" name="tx25"/>
+            <p:cNvPr id="26" name="tx26"/>
             <p:cNvSpPr/>
             <p:nvPr/>
           </p:nvSpPr>
           <p:spPr>
             <a:xfrm>
-              <a:off x="692708" y="3440490"/>
+              <a:off x="692708" y="3579769"/>
               <a:ext cx="217535" cy="80101"/>
             </a:xfrm>
             <a:prstGeom prst="rect">
@@ -3331,13 +3374,13 @@
         </p:sp>
         <p:sp>
           <p:nvSpPr>
-            <p:cNvPr id="26" name="tx26"/>
+            <p:cNvPr id="27" name="tx27"/>
             <p:cNvSpPr/>
             <p:nvPr/>
           </p:nvSpPr>
           <p:spPr>
             <a:xfrm>
-              <a:off x="692708" y="2740530"/>
+              <a:off x="692708" y="2926235"/>
               <a:ext cx="217535" cy="80101"/>
             </a:xfrm>
             <a:prstGeom prst="rect">
@@ -3377,7 +3420,7 @@
         </p:sp>
         <p:sp>
           <p:nvSpPr>
-            <p:cNvPr id="27" name="tx27"/>
+            <p:cNvPr id="28" name="tx28"/>
             <p:cNvSpPr/>
             <p:nvPr/>
           </p:nvSpPr>
@@ -3423,7 +3466,7 @@
         </p:sp>
         <p:sp>
           <p:nvSpPr>
-            <p:cNvPr id="28" name="tx28"/>
+            <p:cNvPr id="29" name="tx29"/>
             <p:cNvSpPr/>
             <p:nvPr/>
           </p:nvSpPr>
@@ -3469,7 +3512,7 @@
         </p:sp>
         <p:sp>
           <p:nvSpPr>
-            <p:cNvPr id="29" name="tx29"/>
+            <p:cNvPr id="30" name="tx30"/>
             <p:cNvSpPr/>
             <p:nvPr/>
           </p:nvSpPr>
@@ -3515,7 +3558,7 @@
         </p:sp>
         <p:sp>
           <p:nvSpPr>
-            <p:cNvPr id="30" name="tx30"/>
+            <p:cNvPr id="31" name="tx31"/>
             <p:cNvSpPr/>
             <p:nvPr/>
           </p:nvSpPr>
@@ -3561,7 +3604,7 @@
         </p:sp>
         <p:sp>
           <p:nvSpPr>
-            <p:cNvPr id="31" name="tx31"/>
+            <p:cNvPr id="32" name="tx32"/>
             <p:cNvSpPr/>
             <p:nvPr/>
           </p:nvSpPr>
@@ -3607,7 +3650,7 @@
         </p:sp>
         <p:sp>
           <p:nvSpPr>
-            <p:cNvPr id="32" name="pl32"/>
+            <p:cNvPr id="33" name="pl33"/>
             <p:cNvSpPr/>
             <p:nvPr/>
           </p:nvSpPr>
@@ -3647,7 +3690,7 @@
         </p:sp>
         <p:sp>
           <p:nvSpPr>
-            <p:cNvPr id="33" name="pl33"/>
+            <p:cNvPr id="34" name="pl34"/>
             <p:cNvSpPr/>
             <p:nvPr/>
           </p:nvSpPr>
@@ -3687,7 +3730,7 @@
         </p:sp>
         <p:sp>
           <p:nvSpPr>
-            <p:cNvPr id="34" name="tx34"/>
+            <p:cNvPr id="35" name="tx35"/>
             <p:cNvSpPr/>
             <p:nvPr/>
           </p:nvSpPr>
@@ -3733,7 +3776,7 @@
         </p:sp>
         <p:sp>
           <p:nvSpPr>
-            <p:cNvPr id="35" name="tx35"/>
+            <p:cNvPr id="36" name="tx36"/>
             <p:cNvSpPr/>
             <p:nvPr/>
           </p:nvSpPr>
@@ -3779,14 +3822,14 @@
         </p:sp>
         <p:sp>
           <p:nvSpPr>
-            <p:cNvPr id="36" name="tx36"/>
+            <p:cNvPr id="37" name="tx37"/>
             <p:cNvSpPr/>
             <p:nvPr/>
           </p:nvSpPr>
           <p:spPr>
             <a:xfrm>
               <a:off x="972874" y="1896563"/>
-              <a:ext cx="3913906" cy="91165"/>
+              <a:ext cx="3984498" cy="91165"/>
             </a:xfrm>
             <a:prstGeom prst="rect">
               <a:avLst/>
@@ -3818,14 +3861,14 @@
                   <a:latin typeface="Helvetica"/>
                   <a:cs typeface="Helvetica"/>
                 </a:rPr>
-                <a:t>Discrep &gt;= +25 vs &lt;+25: subHR = 2.75 (95% CI 0.86-8.76), p = 0.088</a:t>
+                <a:t>Discrep &gt;= +25 vs &lt;+25: subHR = 3.08 (95% CI 0.88-10.74), p = 0.077</a:t>
               </a:r>
             </a:p>
           </p:txBody>
         </p:sp>
         <p:sp>
           <p:nvSpPr>
-            <p:cNvPr id="37" name="tx37"/>
+            <p:cNvPr id="38" name="tx38"/>
             <p:cNvSpPr/>
             <p:nvPr/>
           </p:nvSpPr>

--- a/docs/plots/carbo/jx_carbo_adjcif_throm2.pptx
+++ b/docs/plots/carbo/jx_carbo_adjcif_throm2.pptx
@@ -3002,18 +3002,18 @@
           </p:nvSpPr>
           <p:spPr>
             <a:xfrm>
-              <a:off x="1320344" y="4615919"/>
-              <a:ext cx="6949396" cy="907618"/>
+              <a:off x="1320344" y="4615920"/>
+              <a:ext cx="6949396" cy="907617"/>
             </a:xfrm>
             <a:custGeom>
               <a:avLst/>
               <a:pathLst>
-                <a:path w="6949396" h="907618">
+                <a:path w="6949396" h="907617">
                   <a:moveTo>
-                    <a:pt x="0" y="907618"/>
+                    <a:pt x="0" y="907617"/>
                   </a:moveTo>
                   <a:lnTo>
-                    <a:pt x="106913" y="907618"/>
+                    <a:pt x="106913" y="907617"/>
                   </a:lnTo>
                   <a:lnTo>
                     <a:pt x="106913" y="794183"/>
@@ -3034,10 +3034,10 @@
                     <a:pt x="641482" y="563161"/>
                   </a:lnTo>
                   <a:lnTo>
-                    <a:pt x="641482" y="501986"/>
-                  </a:lnTo>
-                  <a:lnTo>
-                    <a:pt x="748396" y="501986"/>
+                    <a:pt x="641482" y="501985"/>
+                  </a:lnTo>
+                  <a:lnTo>
+                    <a:pt x="748396" y="501985"/>
                   </a:lnTo>
                   <a:lnTo>
                     <a:pt x="748396" y="440307"/>
@@ -3064,10 +3064,10 @@
                     <a:pt x="3848896" y="129668"/>
                   </a:lnTo>
                   <a:lnTo>
-                    <a:pt x="3848896" y="65288"/>
-                  </a:lnTo>
-                  <a:lnTo>
-                    <a:pt x="6949396" y="65288"/>
+                    <a:pt x="3848896" y="65287"/>
+                  </a:lnTo>
+                  <a:lnTo>
+                    <a:pt x="6949396" y="65287"/>
                   </a:lnTo>
                   <a:lnTo>
                     <a:pt x="6949396" y="0"/>
@@ -3380,7 +3380,7 @@
           </p:nvSpPr>
           <p:spPr>
             <a:xfrm>
-              <a:off x="692708" y="2926235"/>
+              <a:off x="692708" y="2926236"/>
               <a:ext cx="217535" cy="80101"/>
             </a:xfrm>
             <a:prstGeom prst="rect">

--- a/docs/plots/carbo/jx_carbo_adjcif_throm2.pptx
+++ b/docs/plots/carbo/jx_carbo_adjcif_throm2.pptx
@@ -2271,26 +2271,26 @@
           </p:nvSpPr>
           <p:spPr>
             <a:xfrm>
-              <a:off x="972874" y="5253655"/>
-              <a:ext cx="7644336" cy="0"/>
+              <a:off x="1113155" y="5190092"/>
+              <a:ext cx="7485076" cy="0"/>
             </a:xfrm>
             <a:custGeom>
               <a:avLst/>
               <a:pathLst>
-                <a:path w="7644336" h="0">
+                <a:path w="7485076" h="0">
                   <a:moveTo>
                     <a:pt x="0" y="0"/>
                   </a:moveTo>
                   <a:lnTo>
-                    <a:pt x="7644336" y="0"/>
-                  </a:lnTo>
-                  <a:lnTo>
-                    <a:pt x="7644336" y="0"/>
+                    <a:pt x="7485076" y="0"/>
+                  </a:lnTo>
+                  <a:lnTo>
+                    <a:pt x="7485076" y="0"/>
                   </a:lnTo>
                 </a:path>
               </a:pathLst>
             </a:custGeom>
-            <a:ln w="6775" cap="flat">
+            <a:ln w="8623" cap="flat">
               <a:solidFill>
                 <a:srgbClr val="EBEBEB">
                   <a:alpha val="100000"/>
@@ -2314,26 +2314,26 @@
           </p:nvSpPr>
           <p:spPr>
             <a:xfrm>
-              <a:off x="972874" y="4600121"/>
-              <a:ext cx="7644336" cy="0"/>
+              <a:off x="1113155" y="4600964"/>
+              <a:ext cx="7485076" cy="0"/>
             </a:xfrm>
             <a:custGeom>
               <a:avLst/>
               <a:pathLst>
-                <a:path w="7644336" h="0">
+                <a:path w="7485076" h="0">
                   <a:moveTo>
                     <a:pt x="0" y="0"/>
                   </a:moveTo>
                   <a:lnTo>
-                    <a:pt x="7644336" y="0"/>
-                  </a:lnTo>
-                  <a:lnTo>
-                    <a:pt x="7644336" y="0"/>
+                    <a:pt x="7485076" y="0"/>
+                  </a:lnTo>
+                  <a:lnTo>
+                    <a:pt x="7485076" y="0"/>
                   </a:lnTo>
                 </a:path>
               </a:pathLst>
             </a:custGeom>
-            <a:ln w="6775" cap="flat">
+            <a:ln w="8623" cap="flat">
               <a:solidFill>
                 <a:srgbClr val="EBEBEB">
                   <a:alpha val="100000"/>
@@ -2357,26 +2357,26 @@
           </p:nvSpPr>
           <p:spPr>
             <a:xfrm>
-              <a:off x="972874" y="3946587"/>
-              <a:ext cx="7644336" cy="0"/>
+              <a:off x="1113155" y="4011836"/>
+              <a:ext cx="7485076" cy="0"/>
             </a:xfrm>
             <a:custGeom>
               <a:avLst/>
               <a:pathLst>
-                <a:path w="7644336" h="0">
+                <a:path w="7485076" h="0">
                   <a:moveTo>
                     <a:pt x="0" y="0"/>
                   </a:moveTo>
                   <a:lnTo>
-                    <a:pt x="7644336" y="0"/>
-                  </a:lnTo>
-                  <a:lnTo>
-                    <a:pt x="7644336" y="0"/>
+                    <a:pt x="7485076" y="0"/>
+                  </a:lnTo>
+                  <a:lnTo>
+                    <a:pt x="7485076" y="0"/>
                   </a:lnTo>
                 </a:path>
               </a:pathLst>
             </a:custGeom>
-            <a:ln w="6775" cap="flat">
+            <a:ln w="8623" cap="flat">
               <a:solidFill>
                 <a:srgbClr val="EBEBEB">
                   <a:alpha val="100000"/>
@@ -2400,26 +2400,26 @@
           </p:nvSpPr>
           <p:spPr>
             <a:xfrm>
-              <a:off x="972874" y="3293053"/>
-              <a:ext cx="7644336" cy="0"/>
+              <a:off x="1113155" y="3422709"/>
+              <a:ext cx="7485076" cy="0"/>
             </a:xfrm>
             <a:custGeom>
               <a:avLst/>
               <a:pathLst>
-                <a:path w="7644336" h="0">
+                <a:path w="7485076" h="0">
                   <a:moveTo>
                     <a:pt x="0" y="0"/>
                   </a:moveTo>
                   <a:lnTo>
-                    <a:pt x="7644336" y="0"/>
-                  </a:lnTo>
-                  <a:lnTo>
-                    <a:pt x="7644336" y="0"/>
+                    <a:pt x="7485076" y="0"/>
+                  </a:lnTo>
+                  <a:lnTo>
+                    <a:pt x="7485076" y="0"/>
                   </a:lnTo>
                 </a:path>
               </a:pathLst>
             </a:custGeom>
-            <a:ln w="6775" cap="flat">
+            <a:ln w="8623" cap="flat">
               <a:solidFill>
                 <a:srgbClr val="EBEBEB">
                   <a:alpha val="100000"/>
@@ -2443,26 +2443,26 @@
           </p:nvSpPr>
           <p:spPr>
             <a:xfrm>
-              <a:off x="972874" y="2639519"/>
-              <a:ext cx="7644336" cy="0"/>
+              <a:off x="1113155" y="2833581"/>
+              <a:ext cx="7485076" cy="0"/>
             </a:xfrm>
             <a:custGeom>
               <a:avLst/>
               <a:pathLst>
-                <a:path w="7644336" h="0">
+                <a:path w="7485076" h="0">
                   <a:moveTo>
                     <a:pt x="0" y="0"/>
                   </a:moveTo>
                   <a:lnTo>
-                    <a:pt x="7644336" y="0"/>
-                  </a:lnTo>
-                  <a:lnTo>
-                    <a:pt x="7644336" y="0"/>
+                    <a:pt x="7485076" y="0"/>
+                  </a:lnTo>
+                  <a:lnTo>
+                    <a:pt x="7485076" y="0"/>
                   </a:lnTo>
                 </a:path>
               </a:pathLst>
             </a:custGeom>
-            <a:ln w="6775" cap="flat">
+            <a:ln w="8623" cap="flat">
               <a:solidFill>
                 <a:srgbClr val="EBEBEB">
                   <a:alpha val="100000"/>
@@ -2486,15 +2486,15 @@
           </p:nvSpPr>
           <p:spPr>
             <a:xfrm>
-              <a:off x="1641085" y="2583293"/>
-              <a:ext cx="0" cy="3139848"/>
+              <a:off x="1767445" y="2782896"/>
+              <a:ext cx="0" cy="2830414"/>
             </a:xfrm>
             <a:custGeom>
               <a:avLst/>
               <a:pathLst>
-                <a:path w="0" h="3139848">
+                <a:path w="0" h="2830414">
                   <a:moveTo>
-                    <a:pt x="0" y="3139848"/>
+                    <a:pt x="0" y="2830414"/>
                   </a:moveTo>
                   <a:lnTo>
                     <a:pt x="0" y="0"/>
@@ -2505,7 +2505,7 @@
                 </a:path>
               </a:pathLst>
             </a:custGeom>
-            <a:ln w="6775" cap="flat">
+            <a:ln w="8623" cap="flat">
               <a:solidFill>
                 <a:srgbClr val="EBEBEB">
                   <a:alpha val="100000"/>
@@ -2529,15 +2529,15 @@
           </p:nvSpPr>
           <p:spPr>
             <a:xfrm>
-              <a:off x="3779361" y="2583293"/>
-              <a:ext cx="0" cy="3139848"/>
+              <a:off x="3861173" y="2782896"/>
+              <a:ext cx="0" cy="2830414"/>
             </a:xfrm>
             <a:custGeom>
               <a:avLst/>
               <a:pathLst>
-                <a:path w="0" h="3139848">
+                <a:path w="0" h="2830414">
                   <a:moveTo>
-                    <a:pt x="0" y="3139848"/>
+                    <a:pt x="0" y="2830414"/>
                   </a:moveTo>
                   <a:lnTo>
                     <a:pt x="0" y="0"/>
@@ -2548,7 +2548,7 @@
                 </a:path>
               </a:pathLst>
             </a:custGeom>
-            <a:ln w="6775" cap="flat">
+            <a:ln w="8623" cap="flat">
               <a:solidFill>
                 <a:srgbClr val="EBEBEB">
                   <a:alpha val="100000"/>
@@ -2572,15 +2572,15 @@
           </p:nvSpPr>
           <p:spPr>
             <a:xfrm>
-              <a:off x="5917637" y="2583293"/>
-              <a:ext cx="0" cy="3139848"/>
+              <a:off x="5954900" y="2782896"/>
+              <a:ext cx="0" cy="2830414"/>
             </a:xfrm>
             <a:custGeom>
               <a:avLst/>
               <a:pathLst>
-                <a:path w="0" h="3139848">
+                <a:path w="0" h="2830414">
                   <a:moveTo>
-                    <a:pt x="0" y="3139848"/>
+                    <a:pt x="0" y="2830414"/>
                   </a:moveTo>
                   <a:lnTo>
                     <a:pt x="0" y="0"/>
@@ -2591,7 +2591,7 @@
                 </a:path>
               </a:pathLst>
             </a:custGeom>
-            <a:ln w="6775" cap="flat">
+            <a:ln w="8623" cap="flat">
               <a:solidFill>
                 <a:srgbClr val="EBEBEB">
                   <a:alpha val="100000"/>
@@ -2615,15 +2615,15 @@
           </p:nvSpPr>
           <p:spPr>
             <a:xfrm>
-              <a:off x="8055913" y="2583293"/>
-              <a:ext cx="0" cy="3139848"/>
+              <a:off x="8048628" y="2782896"/>
+              <a:ext cx="0" cy="2830414"/>
             </a:xfrm>
             <a:custGeom>
               <a:avLst/>
               <a:pathLst>
-                <a:path w="0" h="3139848">
+                <a:path w="0" h="2830414">
                   <a:moveTo>
-                    <a:pt x="0" y="3139848"/>
+                    <a:pt x="0" y="2830414"/>
                   </a:moveTo>
                   <a:lnTo>
                     <a:pt x="0" y="0"/>
@@ -2634,7 +2634,7 @@
                 </a:path>
               </a:pathLst>
             </a:custGeom>
-            <a:ln w="6775" cap="flat">
+            <a:ln w="8623" cap="flat">
               <a:solidFill>
                 <a:srgbClr val="EBEBEB">
                   <a:alpha val="100000"/>
@@ -2658,26 +2658,26 @@
           </p:nvSpPr>
           <p:spPr>
             <a:xfrm>
-              <a:off x="972874" y="5580422"/>
-              <a:ext cx="7644336" cy="0"/>
+              <a:off x="1113155" y="5484655"/>
+              <a:ext cx="7485076" cy="0"/>
             </a:xfrm>
             <a:custGeom>
               <a:avLst/>
               <a:pathLst>
-                <a:path w="7644336" h="0">
+                <a:path w="7485076" h="0">
                   <a:moveTo>
                     <a:pt x="0" y="0"/>
                   </a:moveTo>
                   <a:lnTo>
-                    <a:pt x="7644336" y="0"/>
-                  </a:lnTo>
-                  <a:lnTo>
-                    <a:pt x="7644336" y="0"/>
+                    <a:pt x="7485076" y="0"/>
+                  </a:lnTo>
+                  <a:lnTo>
+                    <a:pt x="7485076" y="0"/>
                   </a:lnTo>
                 </a:path>
               </a:pathLst>
             </a:custGeom>
-            <a:ln w="13550" cap="flat">
+            <a:ln w="17246" cap="flat">
               <a:solidFill>
                 <a:srgbClr val="EBEBEB">
                   <a:alpha val="100000"/>
@@ -2701,26 +2701,26 @@
           </p:nvSpPr>
           <p:spPr>
             <a:xfrm>
-              <a:off x="972874" y="4926888"/>
-              <a:ext cx="7644336" cy="0"/>
+              <a:off x="1113155" y="4895528"/>
+              <a:ext cx="7485076" cy="0"/>
             </a:xfrm>
             <a:custGeom>
               <a:avLst/>
               <a:pathLst>
-                <a:path w="7644336" h="0">
+                <a:path w="7485076" h="0">
                   <a:moveTo>
                     <a:pt x="0" y="0"/>
                   </a:moveTo>
                   <a:lnTo>
-                    <a:pt x="7644336" y="0"/>
-                  </a:lnTo>
-                  <a:lnTo>
-                    <a:pt x="7644336" y="0"/>
+                    <a:pt x="7485076" y="0"/>
+                  </a:lnTo>
+                  <a:lnTo>
+                    <a:pt x="7485076" y="0"/>
                   </a:lnTo>
                 </a:path>
               </a:pathLst>
             </a:custGeom>
-            <a:ln w="13550" cap="flat">
+            <a:ln w="17246" cap="flat">
               <a:solidFill>
                 <a:srgbClr val="EBEBEB">
                   <a:alpha val="100000"/>
@@ -2744,26 +2744,26 @@
           </p:nvSpPr>
           <p:spPr>
             <a:xfrm>
-              <a:off x="972874" y="4273354"/>
-              <a:ext cx="7644336" cy="0"/>
+              <a:off x="1113155" y="4306400"/>
+              <a:ext cx="7485076" cy="0"/>
             </a:xfrm>
             <a:custGeom>
               <a:avLst/>
               <a:pathLst>
-                <a:path w="7644336" h="0">
+                <a:path w="7485076" h="0">
                   <a:moveTo>
                     <a:pt x="0" y="0"/>
                   </a:moveTo>
                   <a:lnTo>
-                    <a:pt x="7644336" y="0"/>
-                  </a:lnTo>
-                  <a:lnTo>
-                    <a:pt x="7644336" y="0"/>
+                    <a:pt x="7485076" y="0"/>
+                  </a:lnTo>
+                  <a:lnTo>
+                    <a:pt x="7485076" y="0"/>
                   </a:lnTo>
                 </a:path>
               </a:pathLst>
             </a:custGeom>
-            <a:ln w="13550" cap="flat">
+            <a:ln w="17246" cap="flat">
               <a:solidFill>
                 <a:srgbClr val="EBEBEB">
                   <a:alpha val="100000"/>
@@ -2787,26 +2787,26 @@
           </p:nvSpPr>
           <p:spPr>
             <a:xfrm>
-              <a:off x="972874" y="3619820"/>
-              <a:ext cx="7644336" cy="0"/>
+              <a:off x="1113155" y="3717273"/>
+              <a:ext cx="7485076" cy="0"/>
             </a:xfrm>
             <a:custGeom>
               <a:avLst/>
               <a:pathLst>
-                <a:path w="7644336" h="0">
+                <a:path w="7485076" h="0">
                   <a:moveTo>
                     <a:pt x="0" y="0"/>
                   </a:moveTo>
                   <a:lnTo>
-                    <a:pt x="7644336" y="0"/>
-                  </a:lnTo>
-                  <a:lnTo>
-                    <a:pt x="7644336" y="0"/>
+                    <a:pt x="7485076" y="0"/>
+                  </a:lnTo>
+                  <a:lnTo>
+                    <a:pt x="7485076" y="0"/>
                   </a:lnTo>
                 </a:path>
               </a:pathLst>
             </a:custGeom>
-            <a:ln w="13550" cap="flat">
+            <a:ln w="17246" cap="flat">
               <a:solidFill>
                 <a:srgbClr val="EBEBEB">
                   <a:alpha val="100000"/>
@@ -2830,26 +2830,26 @@
           </p:nvSpPr>
           <p:spPr>
             <a:xfrm>
-              <a:off x="972874" y="2966286"/>
-              <a:ext cx="7644336" cy="0"/>
+              <a:off x="1113155" y="3128145"/>
+              <a:ext cx="7485076" cy="0"/>
             </a:xfrm>
             <a:custGeom>
               <a:avLst/>
               <a:pathLst>
-                <a:path w="7644336" h="0">
+                <a:path w="7485076" h="0">
                   <a:moveTo>
                     <a:pt x="0" y="0"/>
                   </a:moveTo>
                   <a:lnTo>
-                    <a:pt x="7644336" y="0"/>
-                  </a:lnTo>
-                  <a:lnTo>
-                    <a:pt x="7644336" y="0"/>
+                    <a:pt x="7485076" y="0"/>
+                  </a:lnTo>
+                  <a:lnTo>
+                    <a:pt x="7485076" y="0"/>
                   </a:lnTo>
                 </a:path>
               </a:pathLst>
             </a:custGeom>
-            <a:ln w="13550" cap="flat">
+            <a:ln w="17246" cap="flat">
               <a:solidFill>
                 <a:srgbClr val="EBEBEB">
                   <a:alpha val="100000"/>
@@ -2873,15 +2873,15 @@
           </p:nvSpPr>
           <p:spPr>
             <a:xfrm>
-              <a:off x="2710223" y="2583293"/>
-              <a:ext cx="0" cy="3139848"/>
+              <a:off x="2814309" y="2782896"/>
+              <a:ext cx="0" cy="2830414"/>
             </a:xfrm>
             <a:custGeom>
               <a:avLst/>
               <a:pathLst>
-                <a:path w="0" h="3139848">
+                <a:path w="0" h="2830414">
                   <a:moveTo>
-                    <a:pt x="0" y="3139848"/>
+                    <a:pt x="0" y="2830414"/>
                   </a:moveTo>
                   <a:lnTo>
                     <a:pt x="0" y="0"/>
@@ -2892,7 +2892,7 @@
                 </a:path>
               </a:pathLst>
             </a:custGeom>
-            <a:ln w="13550" cap="flat">
+            <a:ln w="17246" cap="flat">
               <a:solidFill>
                 <a:srgbClr val="EBEBEB">
                   <a:alpha val="100000"/>
@@ -2916,15 +2916,15 @@
           </p:nvSpPr>
           <p:spPr>
             <a:xfrm>
-              <a:off x="4848499" y="2583293"/>
-              <a:ext cx="0" cy="3139848"/>
+              <a:off x="4908036" y="2782896"/>
+              <a:ext cx="0" cy="2830414"/>
             </a:xfrm>
             <a:custGeom>
               <a:avLst/>
               <a:pathLst>
-                <a:path w="0" h="3139848">
+                <a:path w="0" h="2830414">
                   <a:moveTo>
-                    <a:pt x="0" y="3139848"/>
+                    <a:pt x="0" y="2830414"/>
                   </a:moveTo>
                   <a:lnTo>
                     <a:pt x="0" y="0"/>
@@ -2935,7 +2935,7 @@
                 </a:path>
               </a:pathLst>
             </a:custGeom>
-            <a:ln w="13550" cap="flat">
+            <a:ln w="17246" cap="flat">
               <a:solidFill>
                 <a:srgbClr val="EBEBEB">
                   <a:alpha val="100000"/>
@@ -2959,15 +2959,15 @@
           </p:nvSpPr>
           <p:spPr>
             <a:xfrm>
-              <a:off x="6986775" y="2583293"/>
-              <a:ext cx="0" cy="3139848"/>
+              <a:off x="7001764" y="2782896"/>
+              <a:ext cx="0" cy="2830414"/>
             </a:xfrm>
             <a:custGeom>
               <a:avLst/>
               <a:pathLst>
-                <a:path w="0" h="3139848">
+                <a:path w="0" h="2830414">
                   <a:moveTo>
-                    <a:pt x="0" y="3139848"/>
+                    <a:pt x="0" y="2830414"/>
                   </a:moveTo>
                   <a:lnTo>
                     <a:pt x="0" y="0"/>
@@ -2978,7 +2978,7 @@
                 </a:path>
               </a:pathLst>
             </a:custGeom>
-            <a:ln w="13550" cap="flat">
+            <a:ln w="17246" cap="flat">
               <a:solidFill>
                 <a:srgbClr val="EBEBEB">
                   <a:alpha val="100000"/>
@@ -3002,75 +3002,75 @@
           </p:nvSpPr>
           <p:spPr>
             <a:xfrm>
-              <a:off x="1320344" y="4615920"/>
-              <a:ext cx="6949396" cy="907617"/>
+              <a:off x="1453386" y="4615206"/>
+              <a:ext cx="6804615" cy="818171"/>
             </a:xfrm>
             <a:custGeom>
               <a:avLst/>
               <a:pathLst>
-                <a:path w="6949396" h="907617">
+                <a:path w="6804615" h="818171">
                   <a:moveTo>
-                    <a:pt x="0" y="907617"/>
+                    <a:pt x="0" y="818171"/>
                   </a:moveTo>
                   <a:lnTo>
-                    <a:pt x="106913" y="907617"/>
-                  </a:lnTo>
-                  <a:lnTo>
-                    <a:pt x="106913" y="794183"/>
-                  </a:lnTo>
-                  <a:lnTo>
-                    <a:pt x="427655" y="794183"/>
-                  </a:lnTo>
-                  <a:lnTo>
-                    <a:pt x="427655" y="680961"/>
-                  </a:lnTo>
-                  <a:lnTo>
-                    <a:pt x="534568" y="680961"/>
-                  </a:lnTo>
-                  <a:lnTo>
-                    <a:pt x="534568" y="563161"/>
-                  </a:lnTo>
-                  <a:lnTo>
-                    <a:pt x="641482" y="563161"/>
-                  </a:lnTo>
-                  <a:lnTo>
-                    <a:pt x="641482" y="501985"/>
-                  </a:lnTo>
-                  <a:lnTo>
-                    <a:pt x="748396" y="501985"/>
-                  </a:lnTo>
-                  <a:lnTo>
-                    <a:pt x="748396" y="440307"/>
-                  </a:lnTo>
-                  <a:lnTo>
-                    <a:pt x="2459017" y="440307"/>
-                  </a:lnTo>
-                  <a:lnTo>
-                    <a:pt x="2459017" y="256588"/>
-                  </a:lnTo>
-                  <a:lnTo>
-                    <a:pt x="2886672" y="256588"/>
-                  </a:lnTo>
-                  <a:lnTo>
-                    <a:pt x="2886672" y="193804"/>
-                  </a:lnTo>
-                  <a:lnTo>
-                    <a:pt x="3741982" y="193804"/>
-                  </a:lnTo>
-                  <a:lnTo>
-                    <a:pt x="3741982" y="129668"/>
-                  </a:lnTo>
-                  <a:lnTo>
-                    <a:pt x="3848896" y="129668"/>
-                  </a:lnTo>
-                  <a:lnTo>
-                    <a:pt x="3848896" y="65287"/>
-                  </a:lnTo>
-                  <a:lnTo>
-                    <a:pt x="6949396" y="65287"/>
-                  </a:lnTo>
-                  <a:lnTo>
-                    <a:pt x="6949396" y="0"/>
+                    <a:pt x="104686" y="818171"/>
+                  </a:lnTo>
+                  <a:lnTo>
+                    <a:pt x="104686" y="715915"/>
+                  </a:lnTo>
+                  <a:lnTo>
+                    <a:pt x="418745" y="715915"/>
+                  </a:lnTo>
+                  <a:lnTo>
+                    <a:pt x="418745" y="613852"/>
+                  </a:lnTo>
+                  <a:lnTo>
+                    <a:pt x="523431" y="613852"/>
+                  </a:lnTo>
+                  <a:lnTo>
+                    <a:pt x="523431" y="507661"/>
+                  </a:lnTo>
+                  <a:lnTo>
+                    <a:pt x="628118" y="507661"/>
+                  </a:lnTo>
+                  <a:lnTo>
+                    <a:pt x="628118" y="452514"/>
+                  </a:lnTo>
+                  <a:lnTo>
+                    <a:pt x="732804" y="452514"/>
+                  </a:lnTo>
+                  <a:lnTo>
+                    <a:pt x="732804" y="396914"/>
+                  </a:lnTo>
+                  <a:lnTo>
+                    <a:pt x="2407786" y="396914"/>
+                  </a:lnTo>
+                  <a:lnTo>
+                    <a:pt x="2407786" y="231301"/>
+                  </a:lnTo>
+                  <a:lnTo>
+                    <a:pt x="2826532" y="231301"/>
+                  </a:lnTo>
+                  <a:lnTo>
+                    <a:pt x="2826532" y="174704"/>
+                  </a:lnTo>
+                  <a:lnTo>
+                    <a:pt x="3664023" y="174704"/>
+                  </a:lnTo>
+                  <a:lnTo>
+                    <a:pt x="3664023" y="116889"/>
+                  </a:lnTo>
+                  <a:lnTo>
+                    <a:pt x="3768709" y="116889"/>
+                  </a:lnTo>
+                  <a:lnTo>
+                    <a:pt x="3768709" y="58853"/>
+                  </a:lnTo>
+                  <a:lnTo>
+                    <a:pt x="6804615" y="58853"/>
+                  </a:lnTo>
+                  <a:lnTo>
+                    <a:pt x="6804615" y="0"/>
                   </a:lnTo>
                 </a:path>
               </a:pathLst>
@@ -3099,75 +3099,75 @@
           </p:nvSpPr>
           <p:spPr>
             <a:xfrm>
-              <a:off x="1320344" y="2861938"/>
-              <a:ext cx="6949396" cy="2544168"/>
+              <a:off x="1453386" y="3034080"/>
+              <a:ext cx="6804615" cy="2293438"/>
             </a:xfrm>
             <a:custGeom>
               <a:avLst/>
               <a:pathLst>
-                <a:path w="6949396" h="2544168">
+                <a:path w="6804615" h="2293438">
                   <a:moveTo>
-                    <a:pt x="0" y="2544168"/>
+                    <a:pt x="0" y="2293438"/>
                   </a:moveTo>
                   <a:lnTo>
-                    <a:pt x="106913" y="2544168"/>
-                  </a:lnTo>
-                  <a:lnTo>
-                    <a:pt x="106913" y="2202021"/>
-                  </a:lnTo>
-                  <a:lnTo>
-                    <a:pt x="427655" y="2202021"/>
-                  </a:lnTo>
-                  <a:lnTo>
-                    <a:pt x="427655" y="1867656"/>
-                  </a:lnTo>
-                  <a:lnTo>
-                    <a:pt x="534568" y="1867656"/>
-                  </a:lnTo>
-                  <a:lnTo>
-                    <a:pt x="534568" y="1527205"/>
-                  </a:lnTo>
-                  <a:lnTo>
-                    <a:pt x="641482" y="1527205"/>
-                  </a:lnTo>
-                  <a:lnTo>
-                    <a:pt x="641482" y="1353346"/>
-                  </a:lnTo>
-                  <a:lnTo>
-                    <a:pt x="748396" y="1353346"/>
-                  </a:lnTo>
-                  <a:lnTo>
-                    <a:pt x="748396" y="1180068"/>
-                  </a:lnTo>
-                  <a:lnTo>
-                    <a:pt x="2459017" y="1180068"/>
-                  </a:lnTo>
-                  <a:lnTo>
-                    <a:pt x="2459017" y="675704"/>
-                  </a:lnTo>
-                  <a:lnTo>
-                    <a:pt x="2886672" y="675704"/>
-                  </a:lnTo>
-                  <a:lnTo>
-                    <a:pt x="2886672" y="507316"/>
-                  </a:lnTo>
-                  <a:lnTo>
-                    <a:pt x="3741982" y="507316"/>
-                  </a:lnTo>
-                  <a:lnTo>
-                    <a:pt x="3741982" y="337358"/>
-                  </a:lnTo>
-                  <a:lnTo>
-                    <a:pt x="3848896" y="337358"/>
-                  </a:lnTo>
-                  <a:lnTo>
-                    <a:pt x="3848896" y="168819"/>
-                  </a:lnTo>
-                  <a:lnTo>
-                    <a:pt x="6949396" y="168819"/>
-                  </a:lnTo>
-                  <a:lnTo>
-                    <a:pt x="6949396" y="0"/>
+                    <a:pt x="104686" y="2293438"/>
+                  </a:lnTo>
+                  <a:lnTo>
+                    <a:pt x="104686" y="1985010"/>
+                  </a:lnTo>
+                  <a:lnTo>
+                    <a:pt x="418745" y="1985010"/>
+                  </a:lnTo>
+                  <a:lnTo>
+                    <a:pt x="418745" y="1683597"/>
+                  </a:lnTo>
+                  <a:lnTo>
+                    <a:pt x="523431" y="1683597"/>
+                  </a:lnTo>
+                  <a:lnTo>
+                    <a:pt x="523431" y="1376697"/>
+                  </a:lnTo>
+                  <a:lnTo>
+                    <a:pt x="628118" y="1376697"/>
+                  </a:lnTo>
+                  <a:lnTo>
+                    <a:pt x="628118" y="1219973"/>
+                  </a:lnTo>
+                  <a:lnTo>
+                    <a:pt x="732804" y="1219973"/>
+                  </a:lnTo>
+                  <a:lnTo>
+                    <a:pt x="732804" y="1063772"/>
+                  </a:lnTo>
+                  <a:lnTo>
+                    <a:pt x="2407786" y="1063772"/>
+                  </a:lnTo>
+                  <a:lnTo>
+                    <a:pt x="2407786" y="609113"/>
+                  </a:lnTo>
+                  <a:lnTo>
+                    <a:pt x="2826532" y="609113"/>
+                  </a:lnTo>
+                  <a:lnTo>
+                    <a:pt x="2826532" y="457319"/>
+                  </a:lnTo>
+                  <a:lnTo>
+                    <a:pt x="3664023" y="457319"/>
+                  </a:lnTo>
+                  <a:lnTo>
+                    <a:pt x="3664023" y="304111"/>
+                  </a:lnTo>
+                  <a:lnTo>
+                    <a:pt x="3768709" y="304111"/>
+                  </a:lnTo>
+                  <a:lnTo>
+                    <a:pt x="3768709" y="152182"/>
+                  </a:lnTo>
+                  <a:lnTo>
+                    <a:pt x="6804615" y="152182"/>
+                  </a:lnTo>
+                  <a:lnTo>
+                    <a:pt x="6804615" y="0"/>
                   </a:lnTo>
                 </a:path>
               </a:pathLst>
@@ -3196,8 +3196,8 @@
           </p:nvSpPr>
           <p:spPr>
             <a:xfrm>
-              <a:off x="692708" y="5540371"/>
-              <a:ext cx="217535" cy="80101"/>
+              <a:off x="756929" y="5433678"/>
+              <a:ext cx="276514" cy="101955"/>
             </a:xfrm>
             <a:prstGeom prst="rect">
               <a:avLst/>
@@ -3210,7 +3210,7 @@
             <a:p>
               <a:pPr algn="l" marL="0" marR="0" indent="0">
                 <a:lnSpc>
-                  <a:spcPts val="880"/>
+                  <a:spcPts val="1120"/>
                 </a:lnSpc>
                 <a:spcBef>
                   <a:spcPts val="0"/>
@@ -3220,7 +3220,7 @@
                 </a:spcAft>
               </a:pPr>
               <a:r>
-                <a:rPr sz="880">
+                <a:rPr sz="1120">
                   <a:solidFill>
                     <a:srgbClr val="4D4D4D">
                       <a:alpha val="100000"/>
@@ -3242,8 +3242,8 @@
           </p:nvSpPr>
           <p:spPr>
             <a:xfrm>
-              <a:off x="692708" y="4886837"/>
-              <a:ext cx="217535" cy="80101"/>
+              <a:off x="756929" y="4844550"/>
+              <a:ext cx="276514" cy="101955"/>
             </a:xfrm>
             <a:prstGeom prst="rect">
               <a:avLst/>
@@ -3256,7 +3256,7 @@
             <a:p>
               <a:pPr algn="l" marL="0" marR="0" indent="0">
                 <a:lnSpc>
-                  <a:spcPts val="880"/>
+                  <a:spcPts val="1120"/>
                 </a:lnSpc>
                 <a:spcBef>
                   <a:spcPts val="0"/>
@@ -3266,7 +3266,7 @@
                 </a:spcAft>
               </a:pPr>
               <a:r>
-                <a:rPr sz="880">
+                <a:rPr sz="1120">
                   <a:solidFill>
                     <a:srgbClr val="4D4D4D">
                       <a:alpha val="100000"/>
@@ -3288,8 +3288,8 @@
           </p:nvSpPr>
           <p:spPr>
             <a:xfrm>
-              <a:off x="692708" y="4233303"/>
-              <a:ext cx="217535" cy="80101"/>
+              <a:off x="756929" y="4255422"/>
+              <a:ext cx="276514" cy="101955"/>
             </a:xfrm>
             <a:prstGeom prst="rect">
               <a:avLst/>
@@ -3302,7 +3302,7 @@
             <a:p>
               <a:pPr algn="l" marL="0" marR="0" indent="0">
                 <a:lnSpc>
-                  <a:spcPts val="880"/>
+                  <a:spcPts val="1120"/>
                 </a:lnSpc>
                 <a:spcBef>
                   <a:spcPts val="0"/>
@@ -3312,7 +3312,7 @@
                 </a:spcAft>
               </a:pPr>
               <a:r>
-                <a:rPr sz="880">
+                <a:rPr sz="1120">
                   <a:solidFill>
                     <a:srgbClr val="4D4D4D">
                       <a:alpha val="100000"/>
@@ -3334,8 +3334,8 @@
           </p:nvSpPr>
           <p:spPr>
             <a:xfrm>
-              <a:off x="692708" y="3579769"/>
-              <a:ext cx="217535" cy="80101"/>
+              <a:off x="756929" y="3666295"/>
+              <a:ext cx="276514" cy="101955"/>
             </a:xfrm>
             <a:prstGeom prst="rect">
               <a:avLst/>
@@ -3348,7 +3348,7 @@
             <a:p>
               <a:pPr algn="l" marL="0" marR="0" indent="0">
                 <a:lnSpc>
-                  <a:spcPts val="880"/>
+                  <a:spcPts val="1120"/>
                 </a:lnSpc>
                 <a:spcBef>
                   <a:spcPts val="0"/>
@@ -3358,7 +3358,7 @@
                 </a:spcAft>
               </a:pPr>
               <a:r>
-                <a:rPr sz="880">
+                <a:rPr sz="1120">
                   <a:solidFill>
                     <a:srgbClr val="4D4D4D">
                       <a:alpha val="100000"/>
@@ -3380,8 +3380,8 @@
           </p:nvSpPr>
           <p:spPr>
             <a:xfrm>
-              <a:off x="692708" y="2926236"/>
-              <a:ext cx="217535" cy="80101"/>
+              <a:off x="756929" y="3077167"/>
+              <a:ext cx="276514" cy="101955"/>
             </a:xfrm>
             <a:prstGeom prst="rect">
               <a:avLst/>
@@ -3394,7 +3394,7 @@
             <a:p>
               <a:pPr algn="l" marL="0" marR="0" indent="0">
                 <a:lnSpc>
-                  <a:spcPts val="880"/>
+                  <a:spcPts val="1120"/>
                 </a:lnSpc>
                 <a:spcBef>
                   <a:spcPts val="0"/>
@@ -3404,7 +3404,7 @@
                 </a:spcAft>
               </a:pPr>
               <a:r>
-                <a:rPr sz="880">
+                <a:rPr sz="1120">
                   <a:solidFill>
                     <a:srgbClr val="4D4D4D">
                       <a:alpha val="100000"/>
@@ -3426,8 +3426,8 @@
           </p:nvSpPr>
           <p:spPr>
             <a:xfrm>
-              <a:off x="2648044" y="5785772"/>
-              <a:ext cx="124358" cy="80101"/>
+              <a:off x="2735305" y="5693022"/>
+              <a:ext cx="158008" cy="101955"/>
             </a:xfrm>
             <a:prstGeom prst="rect">
               <a:avLst/>
@@ -3440,7 +3440,7 @@
             <a:p>
               <a:pPr algn="l" marL="0" marR="0" indent="0">
                 <a:lnSpc>
-                  <a:spcPts val="880"/>
+                  <a:spcPts val="1120"/>
                 </a:lnSpc>
                 <a:spcBef>
                   <a:spcPts val="0"/>
@@ -3450,7 +3450,7 @@
                 </a:spcAft>
               </a:pPr>
               <a:r>
-                <a:rPr sz="880">
+                <a:rPr sz="1120">
                   <a:solidFill>
                     <a:srgbClr val="4D4D4D">
                       <a:alpha val="100000"/>
@@ -3472,8 +3472,8 @@
           </p:nvSpPr>
           <p:spPr>
             <a:xfrm>
-              <a:off x="4786320" y="5785772"/>
-              <a:ext cx="124358" cy="80101"/>
+              <a:off x="4829032" y="5693022"/>
+              <a:ext cx="158008" cy="101955"/>
             </a:xfrm>
             <a:prstGeom prst="rect">
               <a:avLst/>
@@ -3486,7 +3486,7 @@
             <a:p>
               <a:pPr algn="l" marL="0" marR="0" indent="0">
                 <a:lnSpc>
-                  <a:spcPts val="880"/>
+                  <a:spcPts val="1120"/>
                 </a:lnSpc>
                 <a:spcBef>
                   <a:spcPts val="0"/>
@@ -3496,7 +3496,7 @@
                 </a:spcAft>
               </a:pPr>
               <a:r>
-                <a:rPr sz="880">
+                <a:rPr sz="1120">
                   <a:solidFill>
                     <a:srgbClr val="4D4D4D">
                       <a:alpha val="100000"/>
@@ -3518,8 +3518,8 @@
           </p:nvSpPr>
           <p:spPr>
             <a:xfrm>
-              <a:off x="6924596" y="5785772"/>
-              <a:ext cx="124358" cy="80101"/>
+              <a:off x="6922760" y="5693022"/>
+              <a:ext cx="158008" cy="101955"/>
             </a:xfrm>
             <a:prstGeom prst="rect">
               <a:avLst/>
@@ -3532,7 +3532,7 @@
             <a:p>
               <a:pPr algn="l" marL="0" marR="0" indent="0">
                 <a:lnSpc>
-                  <a:spcPts val="880"/>
+                  <a:spcPts val="1120"/>
                 </a:lnSpc>
                 <a:spcBef>
                   <a:spcPts val="0"/>
@@ -3542,7 +3542,7 @@
                 </a:spcAft>
               </a:pPr>
               <a:r>
-                <a:rPr sz="880">
+                <a:rPr sz="1120">
                   <a:solidFill>
                     <a:srgbClr val="4D4D4D">
                       <a:alpha val="100000"/>
@@ -3564,8 +3564,8 @@
           </p:nvSpPr>
           <p:spPr>
             <a:xfrm>
-              <a:off x="4197162" y="5925448"/>
-              <a:ext cx="1195760" cy="100218"/>
+              <a:off x="4094958" y="5870717"/>
+              <a:ext cx="1521470" cy="127558"/>
             </a:xfrm>
             <a:prstGeom prst="rect">
               <a:avLst/>
@@ -3578,7 +3578,7 @@
             <a:p>
               <a:pPr algn="l" marL="0" marR="0" indent="0">
                 <a:lnSpc>
-                  <a:spcPts val="1100"/>
+                  <a:spcPts val="1400"/>
                 </a:lnSpc>
                 <a:spcBef>
                   <a:spcPts val="0"/>
@@ -3588,7 +3588,7 @@
                 </a:spcAft>
               </a:pPr>
               <a:r>
-                <a:rPr sz="1100">
+                <a:rPr sz="1400">
                   <a:solidFill>
                     <a:srgbClr val="000000">
                       <a:alpha val="100000"/>
@@ -3610,8 +3610,8 @@
           </p:nvSpPr>
           <p:spPr>
             <a:xfrm rot="-5400000">
-              <a:off x="-87047" y="4103109"/>
-              <a:ext cx="1327891" cy="100218"/>
+              <a:off x="-235221" y="4134324"/>
+              <a:ext cx="1689536" cy="127558"/>
             </a:xfrm>
             <a:prstGeom prst="rect">
               <a:avLst/>
@@ -3624,7 +3624,7 @@
             <a:p>
               <a:pPr algn="l" marL="0" marR="0" indent="0">
                 <a:lnSpc>
-                  <a:spcPts val="1100"/>
+                  <a:spcPts val="1400"/>
                 </a:lnSpc>
                 <a:spcBef>
                   <a:spcPts val="0"/>
@@ -3634,7 +3634,7 @@
                 </a:spcAft>
               </a:pPr>
               <a:r>
-                <a:rPr sz="1100">
+                <a:rPr sz="1400">
                   <a:solidFill>
                     <a:srgbClr val="000000">
                       <a:alpha val="100000"/>
@@ -3656,7 +3656,7 @@
           </p:nvSpPr>
           <p:spPr>
             <a:xfrm>
-              <a:off x="3578565" y="2264798"/>
+              <a:off x="3362626" y="2407465"/>
               <a:ext cx="175564" cy="0"/>
             </a:xfrm>
             <a:custGeom>
@@ -3696,7 +3696,7 @@
           </p:nvSpPr>
           <p:spPr>
             <a:xfrm>
-              <a:off x="4819138" y="2264798"/>
+              <a:off x="4880455" y="2407465"/>
               <a:ext cx="175564" cy="0"/>
             </a:xfrm>
             <a:custGeom>
@@ -3736,8 +3736,8 @@
           </p:nvSpPr>
           <p:spPr>
             <a:xfrm>
-              <a:off x="3845665" y="2224748"/>
-              <a:ext cx="881938" cy="80101"/>
+              <a:off x="3648704" y="2356487"/>
+              <a:ext cx="1121237" cy="101955"/>
             </a:xfrm>
             <a:prstGeom prst="rect">
               <a:avLst/>
@@ -3750,7 +3750,7 @@
             <a:p>
               <a:pPr algn="l" marL="0" marR="0" indent="0">
                 <a:lnSpc>
-                  <a:spcPts val="880"/>
+                  <a:spcPts val="1120"/>
                 </a:lnSpc>
                 <a:spcBef>
                   <a:spcPts val="0"/>
@@ -3760,7 +3760,7 @@
                 </a:spcAft>
               </a:pPr>
               <a:r>
-                <a:rPr sz="880">
+                <a:rPr sz="1120">
                   <a:solidFill>
                     <a:srgbClr val="000000">
                       <a:alpha val="100000"/>
@@ -3782,8 +3782,8 @@
           </p:nvSpPr>
           <p:spPr>
             <a:xfrm>
-              <a:off x="5086238" y="2224748"/>
-              <a:ext cx="947226" cy="80101"/>
+              <a:off x="5166533" y="2356487"/>
+              <a:ext cx="1204173" cy="101955"/>
             </a:xfrm>
             <a:prstGeom prst="rect">
               <a:avLst/>
@@ -3796,7 +3796,7 @@
             <a:p>
               <a:pPr algn="l" marL="0" marR="0" indent="0">
                 <a:lnSpc>
-                  <a:spcPts val="880"/>
+                  <a:spcPts val="1120"/>
                 </a:lnSpc>
                 <a:spcBef>
                   <a:spcPts val="0"/>
@@ -3806,7 +3806,7 @@
                 </a:spcAft>
               </a:pPr>
               <a:r>
-                <a:rPr sz="880">
+                <a:rPr sz="1120">
                   <a:solidFill>
                     <a:srgbClr val="000000">
                       <a:alpha val="100000"/>
@@ -3828,8 +3828,8 @@
           </p:nvSpPr>
           <p:spPr>
             <a:xfrm>
-              <a:off x="972874" y="1896563"/>
-              <a:ext cx="3984498" cy="91165"/>
+              <a:off x="1113155" y="1977589"/>
+              <a:ext cx="4782220" cy="109362"/>
             </a:xfrm>
             <a:prstGeom prst="rect">
               <a:avLst/>
@@ -3842,7 +3842,7 @@
             <a:p>
               <a:pPr algn="l" marL="0" marR="0" indent="0">
                 <a:lnSpc>
-                  <a:spcPts val="1000"/>
+                  <a:spcPts val="1200"/>
                 </a:lnSpc>
                 <a:spcBef>
                   <a:spcPts val="0"/>
@@ -3852,7 +3852,7 @@
                 </a:spcAft>
               </a:pPr>
               <a:r>
-                <a:rPr sz="1000">
+                <a:rPr sz="1200">
                   <a:solidFill>
                     <a:srgbClr val="404040">
                       <a:alpha val="100000"/>
@@ -3874,8 +3874,8 @@
           </p:nvSpPr>
           <p:spPr>
             <a:xfrm>
-              <a:off x="972874" y="1669789"/>
-              <a:ext cx="2039386" cy="120152"/>
+              <a:off x="1113155" y="1688767"/>
+              <a:ext cx="2596164" cy="153070"/>
             </a:xfrm>
             <a:prstGeom prst="rect">
               <a:avLst/>
@@ -3888,7 +3888,7 @@
             <a:p>
               <a:pPr algn="l" marL="0" marR="0" indent="0">
                 <a:lnSpc>
-                  <a:spcPts val="1320"/>
+                  <a:spcPts val="1680"/>
                 </a:lnSpc>
                 <a:spcBef>
                   <a:spcPts val="0"/>
@@ -3898,7 +3898,7 @@
                 </a:spcAft>
               </a:pPr>
               <a:r>
-                <a:rPr sz="1320">
+                <a:rPr sz="1680">
                   <a:solidFill>
                     <a:srgbClr val="000000">
                       <a:alpha val="100000"/>
